--- a/202312/MIS41.pptx
+++ b/202312/MIS41.pptx
@@ -14,7 +14,7 @@
     <p:sldId id="259" r:id="rId5"/>
     <p:sldId id="260" r:id="rId6"/>
     <p:sldId id="261" r:id="rId7"/>
-    <p:sldId id="262" r:id="rId8"/>
+    <p:sldId id="268" r:id="rId8"/>
     <p:sldId id="266" r:id="rId9"/>
     <p:sldId id="264" r:id="rId10"/>
     <p:sldId id="265" r:id="rId11"/>
@@ -5606,7 +5606,7 @@
         <p:spPr>
           <a:xfrm>
             <a:off x="0" y="523220"/>
-            <a:ext cx="12192000" cy="1477328"/>
+            <a:ext cx="12192000" cy="1200329"/>
           </a:xfrm>
           <a:prstGeom prst="rect">
             <a:avLst/>
@@ -5621,7 +5621,7 @@
           <a:p>
             <a:r>
               <a:rPr lang="ja-JP" altLang="en-US"/>
-              <a:t>既存の指標のみからでは見えにくい被引用数の変動やこれによ る 順 位 の 変 動 の よ う な ダ イ ナ ミ ク スを観察する</a:t>
+              <a:t>既存の指標のみからでは見えにくい被引用数の変動やこれによる順位の変動のようなダイナミクスを観察する</a:t>
             </a:r>
             <a:endParaRPr lang="en-US" altLang="ja-JP"/>
           </a:p>
@@ -5632,7 +5632,7 @@
             </a:pPr>
             <a:r>
               <a:rPr lang="ja-JP" altLang="en-US"/>
-              <a:t>長期にわたる被引用の可視化</a:t>
+              <a:t>長期にわたる被引用数の変動、これによる順位の変動</a:t>
             </a:r>
             <a:endParaRPr lang="en-US" altLang="ja-JP"/>
           </a:p>
@@ -5643,7 +5643,7 @@
             </a:pPr>
             <a:r>
               <a:rPr lang="ja-JP" altLang="en-US"/>
-              <a:t>ピークに関する特性</a:t>
+              <a:t>被引用ピークに関する特性</a:t>
             </a:r>
             <a:endParaRPr lang="en-US" altLang="ja-JP"/>
           </a:p>
@@ -8440,7 +8440,7 @@
         <p:cNvPr id="1" name="">
           <a:extLst>
             <a:ext uri="{FF2B5EF4-FFF2-40B4-BE49-F238E27FC236}">
-              <a16:creationId xmlns:a16="http://schemas.microsoft.com/office/drawing/2014/main" id="{A383F596-BAC8-D595-7652-6B3D83563A6E}"/>
+              <a16:creationId xmlns:a16="http://schemas.microsoft.com/office/drawing/2014/main" id="{E2F6FE43-3155-25D0-9D0B-1E0B572380FE}"/>
             </a:ext>
           </a:extLst>
         </p:cNvPr>
@@ -8460,7 +8460,7 @@
           <p:cNvPr id="4" name="テキスト ボックス 3">
             <a:extLst>
               <a:ext uri="{FF2B5EF4-FFF2-40B4-BE49-F238E27FC236}">
-                <a16:creationId xmlns:a16="http://schemas.microsoft.com/office/drawing/2014/main" id="{F02D14AA-767B-FA4A-DC77-447041214780}"/>
+                <a16:creationId xmlns:a16="http://schemas.microsoft.com/office/drawing/2014/main" id="{EF50FBDC-84B5-CD61-78B2-2318A280C65B}"/>
               </a:ext>
             </a:extLst>
           </p:cNvPr>
@@ -8499,7 +8499,7 @@
           <p:cNvPr id="2" name="テキスト ボックス 1">
             <a:extLst>
               <a:ext uri="{FF2B5EF4-FFF2-40B4-BE49-F238E27FC236}">
-                <a16:creationId xmlns:a16="http://schemas.microsoft.com/office/drawing/2014/main" id="{116C639B-B726-7FFB-37C6-C4099F2692A0}"/>
+                <a16:creationId xmlns:a16="http://schemas.microsoft.com/office/drawing/2014/main" id="{F06DCC28-B4A7-9726-3CEB-0092057A6A9D}"/>
               </a:ext>
             </a:extLst>
           </p:cNvPr>
@@ -8580,10 +8580,10 @@
       </p:sp>
       <p:pic>
         <p:nvPicPr>
-          <p:cNvPr id="3" name="図 2">
-            <a:extLst>
-              <a:ext uri="{FF2B5EF4-FFF2-40B4-BE49-F238E27FC236}">
-                <a16:creationId xmlns:a16="http://schemas.microsoft.com/office/drawing/2014/main" id="{0644886A-E1EF-DE41-5C23-0F09D5E39ACD}"/>
+          <p:cNvPr id="5" name="図 4">
+            <a:extLst>
+              <a:ext uri="{FF2B5EF4-FFF2-40B4-BE49-F238E27FC236}">
+                <a16:creationId xmlns:a16="http://schemas.microsoft.com/office/drawing/2014/main" id="{F19C8134-F918-A8C9-DF52-F67A261C3659}"/>
               </a:ext>
             </a:extLst>
           </p:cNvPr>
@@ -8600,8 +8600,8 @@
         </p:blipFill>
         <p:spPr>
           <a:xfrm>
-            <a:off x="2209800" y="1840987"/>
-            <a:ext cx="7772400" cy="4815044"/>
+            <a:off x="2184400" y="1831707"/>
+            <a:ext cx="7823200" cy="4850384"/>
           </a:xfrm>
           <a:prstGeom prst="rect">
             <a:avLst/>
@@ -8611,7 +8611,7 @@
     </p:spTree>
     <p:extLst>
       <p:ext uri="{BB962C8B-B14F-4D97-AF65-F5344CB8AC3E}">
-        <p14:creationId xmlns:p14="http://schemas.microsoft.com/office/powerpoint/2010/main" val="56004149"/>
+        <p14:creationId xmlns:p14="http://schemas.microsoft.com/office/powerpoint/2010/main" val="1851931817"/>
       </p:ext>
     </p:extLst>
   </p:cSld>

--- a/202312/MIS41.pptx
+++ b/202312/MIS41.pptx
@@ -4867,8 +4867,8 @@
         </p:nvSpPr>
         <p:spPr>
           <a:xfrm>
-            <a:off x="7581633" y="6409425"/>
-            <a:ext cx="4498347" cy="307777"/>
+            <a:off x="7348721" y="6409425"/>
+            <a:ext cx="4677884" cy="307777"/>
           </a:xfrm>
           <a:prstGeom prst="rect">
             <a:avLst/>
@@ -4895,7 +4895,7 @@
             </a:r>
             <a:r>
               <a:rPr kumimoji="1" lang="ja-JP" altLang="en-US" sz="1400"/>
-              <a:t>、それ以外で大きな数を返す</a:t>
+              <a:t>、それ以外では大きな数を返す</a:t>
             </a:r>
           </a:p>
         </p:txBody>
@@ -7098,15 +7098,43 @@
             </a:r>
             <a:r>
               <a:rPr kumimoji="1" lang="en-US" altLang="ja-JP"/>
-              <a:t>(C r^-a)</a:t>
+              <a:t>(</a:t>
+            </a:r>
+            <a:r>
+              <a:rPr kumimoji="1" lang="en-US" altLang="ja-JP" i="1"/>
+              <a:t>C</a:t>
+            </a:r>
+            <a:r>
+              <a:rPr kumimoji="1" lang="en-US" altLang="ja-JP"/>
+              <a:t> </a:t>
+            </a:r>
+            <a:r>
+              <a:rPr kumimoji="1" lang="en-US" altLang="ja-JP" i="1"/>
+              <a:t>r</a:t>
+            </a:r>
+            <a:r>
+              <a:rPr kumimoji="1" lang="en-US" altLang="ja-JP"/>
+              <a:t>^-</a:t>
+            </a:r>
+            <a:r>
+              <a:rPr kumimoji="1" lang="en-US" altLang="ja-JP" i="1"/>
+              <a:t>a</a:t>
+            </a:r>
+            <a:r>
+              <a:rPr kumimoji="1" lang="en-US" altLang="ja-JP"/>
+              <a:t>)</a:t>
             </a:r>
             <a:r>
               <a:rPr kumimoji="1" lang="ja-JP" altLang="en-US"/>
               <a:t>にフィットさせた時の係数</a:t>
             </a:r>
             <a:r>
+              <a:rPr kumimoji="1" lang="en-US" altLang="ja-JP" i="1"/>
+              <a:t>a</a:t>
+            </a:r>
+            <a:r>
               <a:rPr kumimoji="1" lang="en-US" altLang="ja-JP"/>
-              <a:t>a=0.5</a:t>
+              <a:t>=0.5</a:t>
             </a:r>
           </a:p>
         </p:txBody>

--- a/202312/MIS41.pptx
+++ b/202312/MIS41.pptx
@@ -206,7 +206,7 @@
           </a:lstStyle>
           <a:p>
             <a:fld id="{EC76ED7C-0D2F-D44D-81F8-4029A7FBE0FF}" type="datetimeFigureOut">
-              <a:t>2026/5/13</a:t>
+              <a:t>2026/5/14</a:t>
             </a:fld>
             <a:endParaRPr kumimoji="1" lang="ja-JP" altLang="en-US"/>
           </a:p>
@@ -733,7 +733,7 @@
           <a:lstStyle/>
           <a:p>
             <a:fld id="{B6986787-D869-A342-B24E-761DB6FBB920}" type="datetimeFigureOut">
-              <a:t>2026/5/13</a:t>
+              <a:t>2026/5/14</a:t>
             </a:fld>
             <a:endParaRPr kumimoji="1" lang="ja-JP" altLang="en-US"/>
           </a:p>
@@ -961,7 +961,7 @@
           <a:lstStyle/>
           <a:p>
             <a:fld id="{B6986787-D869-A342-B24E-761DB6FBB920}" type="datetimeFigureOut">
-              <a:t>2026/5/13</a:t>
+              <a:t>2026/5/14</a:t>
             </a:fld>
             <a:endParaRPr kumimoji="1" lang="ja-JP" altLang="en-US"/>
           </a:p>
@@ -1199,7 +1199,7 @@
           <a:lstStyle/>
           <a:p>
             <a:fld id="{B6986787-D869-A342-B24E-761DB6FBB920}" type="datetimeFigureOut">
-              <a:t>2026/5/13</a:t>
+              <a:t>2026/5/14</a:t>
             </a:fld>
             <a:endParaRPr kumimoji="1" lang="ja-JP" altLang="en-US"/>
           </a:p>
@@ -1427,7 +1427,7 @@
           <a:lstStyle/>
           <a:p>
             <a:fld id="{B6986787-D869-A342-B24E-761DB6FBB920}" type="datetimeFigureOut">
-              <a:t>2026/5/13</a:t>
+              <a:t>2026/5/14</a:t>
             </a:fld>
             <a:endParaRPr kumimoji="1" lang="ja-JP" altLang="en-US"/>
           </a:p>
@@ -1700,7 +1700,7 @@
           <a:lstStyle/>
           <a:p>
             <a:fld id="{B6986787-D869-A342-B24E-761DB6FBB920}" type="datetimeFigureOut">
-              <a:t>2026/5/13</a:t>
+              <a:t>2026/5/14</a:t>
             </a:fld>
             <a:endParaRPr kumimoji="1" lang="ja-JP" altLang="en-US"/>
           </a:p>
@@ -2027,7 +2027,7 @@
           <a:lstStyle/>
           <a:p>
             <a:fld id="{B6986787-D869-A342-B24E-761DB6FBB920}" type="datetimeFigureOut">
-              <a:t>2026/5/13</a:t>
+              <a:t>2026/5/14</a:t>
             </a:fld>
             <a:endParaRPr kumimoji="1" lang="ja-JP" altLang="en-US"/>
           </a:p>
@@ -2501,7 +2501,7 @@
           <a:lstStyle/>
           <a:p>
             <a:fld id="{B6986787-D869-A342-B24E-761DB6FBB920}" type="datetimeFigureOut">
-              <a:t>2026/5/13</a:t>
+              <a:t>2026/5/14</a:t>
             </a:fld>
             <a:endParaRPr kumimoji="1" lang="ja-JP" altLang="en-US"/>
           </a:p>
@@ -2640,7 +2640,7 @@
           <a:lstStyle/>
           <a:p>
             <a:fld id="{B6986787-D869-A342-B24E-761DB6FBB920}" type="datetimeFigureOut">
-              <a:t>2026/5/13</a:t>
+              <a:t>2026/5/14</a:t>
             </a:fld>
             <a:endParaRPr kumimoji="1" lang="ja-JP" altLang="en-US"/>
           </a:p>
@@ -2751,7 +2751,7 @@
           <a:lstStyle/>
           <a:p>
             <a:fld id="{B6986787-D869-A342-B24E-761DB6FBB920}" type="datetimeFigureOut">
-              <a:t>2026/5/13</a:t>
+              <a:t>2026/5/14</a:t>
             </a:fld>
             <a:endParaRPr kumimoji="1" lang="ja-JP" altLang="en-US"/>
           </a:p>
@@ -3092,7 +3092,7 @@
           <a:lstStyle/>
           <a:p>
             <a:fld id="{B6986787-D869-A342-B24E-761DB6FBB920}" type="datetimeFigureOut">
-              <a:t>2026/5/13</a:t>
+              <a:t>2026/5/14</a:t>
             </a:fld>
             <a:endParaRPr kumimoji="1" lang="ja-JP" altLang="en-US"/>
           </a:p>
@@ -3378,7 +3378,7 @@
           <a:lstStyle/>
           <a:p>
             <a:fld id="{B6986787-D869-A342-B24E-761DB6FBB920}" type="datetimeFigureOut">
-              <a:t>2026/5/13</a:t>
+              <a:t>2026/5/14</a:t>
             </a:fld>
             <a:endParaRPr kumimoji="1" lang="ja-JP" altLang="en-US"/>
           </a:p>
@@ -3649,7 +3649,7 @@
           </a:lstStyle>
           <a:p>
             <a:fld id="{B6986787-D869-A342-B24E-761DB6FBB920}" type="datetimeFigureOut">
-              <a:t>2026/5/13</a:t>
+              <a:t>2026/5/14</a:t>
             </a:fld>
             <a:endParaRPr kumimoji="1" lang="ja-JP" altLang="en-US"/>
           </a:p>
@@ -8326,17 +8326,17 @@
           <a:p>
             <a:r>
               <a:rPr kumimoji="1" lang="ja-JP" altLang="en-US"/>
-              <a:t>被引用数累計上位</a:t>
-            </a:r>
-            <a:r>
-              <a:rPr kumimoji="1" lang="en-US" altLang="ja-JP"/>
+              <a:t>上位</a:t>
+            </a:r>
+            <a:r>
+              <a:rPr kumimoji="1" lang="en-US" altLang="ja-JP" dirty="0"/>
               <a:t>1000</a:t>
             </a:r>
             <a:r>
               <a:rPr lang="ja-JP" altLang="en-US"/>
               <a:t>論文以外</a:t>
             </a:r>
-            <a:endParaRPr lang="en-US" altLang="ja-JP"/>
+            <a:endParaRPr lang="en-US" altLang="ja-JP" dirty="0"/>
           </a:p>
           <a:p>
             <a:pPr marL="285750" indent="-285750">
@@ -8344,7 +8344,7 @@
               <a:buChar char="•"/>
             </a:pPr>
             <a:r>
-              <a:rPr kumimoji="1" lang="en-US" altLang="ja-JP"/>
+              <a:rPr kumimoji="1" lang="en-US" altLang="ja-JP" dirty="0"/>
               <a:t>4</a:t>
             </a:r>
             <a:r>
@@ -8352,7 +8352,7 @@
               <a:t>分位区間それぞれの上位</a:t>
             </a:r>
             <a:r>
-              <a:rPr kumimoji="1" lang="en-US" altLang="ja-JP"/>
+              <a:rPr kumimoji="1" lang="en-US" altLang="ja-JP" dirty="0"/>
               <a:t>1000</a:t>
             </a:r>
             <a:r>
@@ -8363,7 +8363,7 @@
               <a:rPr lang="ja-JP" altLang="en-US"/>
               <a:t>したが</a:t>
             </a:r>
-            <a:endParaRPr kumimoji="1" lang="en-US" altLang="ja-JP"/>
+            <a:endParaRPr kumimoji="1" lang="en-US" altLang="ja-JP" dirty="0"/>
           </a:p>
           <a:p>
             <a:pPr marL="285750" indent="-285750">
@@ -8375,14 +8375,14 @@
               <a:t>第</a:t>
             </a:r>
             <a:r>
-              <a:rPr lang="en-US" altLang="ja-JP"/>
+              <a:rPr lang="en-US" altLang="ja-JP" dirty="0"/>
               <a:t>2~4</a:t>
             </a:r>
             <a:r>
               <a:rPr lang="ja-JP" altLang="en-US"/>
               <a:t>分位区間では</a:t>
             </a:r>
-            <a:endParaRPr lang="en-US" altLang="ja-JP"/>
+            <a:endParaRPr lang="en-US" altLang="ja-JP" dirty="0"/>
           </a:p>
           <a:p>
             <a:pPr marL="742950" lvl="1" indent="-285750">
@@ -8394,14 +8394,14 @@
               <a:t>被引用数が少ない（</a:t>
             </a:r>
             <a:r>
-              <a:rPr kumimoji="1" lang="en-US" altLang="ja-JP"/>
+              <a:rPr kumimoji="1" lang="en-US" altLang="ja-JP" dirty="0"/>
               <a:t>2~11</a:t>
             </a:r>
             <a:r>
               <a:rPr kumimoji="1" lang="ja-JP" altLang="en-US"/>
               <a:t>）</a:t>
             </a:r>
-            <a:endParaRPr kumimoji="1" lang="en-US" altLang="ja-JP"/>
+            <a:endParaRPr kumimoji="1" lang="en-US" altLang="ja-JP" dirty="0"/>
           </a:p>
           <a:p>
             <a:pPr marL="742950" lvl="1" indent="-285750">
@@ -8413,7 +8413,7 @@
               <a:t>区間内論文の被引用数が全て同じ（</a:t>
             </a:r>
             <a:r>
-              <a:rPr lang="en-US" altLang="ja-JP"/>
+              <a:rPr lang="en-US" altLang="ja-JP" dirty="0"/>
               <a:t>2</a:t>
             </a:r>
             <a:r>
@@ -8421,7 +8421,7 @@
               <a:t>、</a:t>
             </a:r>
             <a:r>
-              <a:rPr lang="en-US" altLang="ja-JP"/>
+              <a:rPr lang="en-US" altLang="ja-JP" dirty="0"/>
               <a:t>4</a:t>
             </a:r>
             <a:r>
@@ -8429,14 +8429,14 @@
               <a:t>、</a:t>
             </a:r>
             <a:r>
-              <a:rPr lang="en-US" altLang="ja-JP"/>
+              <a:rPr lang="en-US" altLang="ja-JP" dirty="0"/>
               <a:t>11</a:t>
             </a:r>
             <a:r>
               <a:rPr lang="ja-JP" altLang="en-US"/>
               <a:t>）</a:t>
             </a:r>
-            <a:endParaRPr kumimoji="1" lang="en-US" altLang="ja-JP"/>
+            <a:endParaRPr kumimoji="1" lang="en-US" altLang="ja-JP" dirty="0"/>
           </a:p>
           <a:p>
             <a:r>

--- a/202312/MIS41.pptx
+++ b/202312/MIS41.pptx
@@ -5232,7 +5232,7 @@
           <a:p>
             <a:r>
               <a:rPr lang="ja-JP" altLang="en-US" sz="2800"/>
-              <a:t>関連研究</a:t>
+              <a:t>関連研究・背景</a:t>
             </a:r>
             <a:endParaRPr kumimoji="1" lang="ja-JP" altLang="en-US" sz="2800"/>
           </a:p>
@@ -5253,7 +5253,7 @@
         <p:spPr>
           <a:xfrm>
             <a:off x="0" y="523220"/>
-            <a:ext cx="12192000" cy="1200329"/>
+            <a:ext cx="12192000" cy="5355312"/>
           </a:xfrm>
           <a:prstGeom prst="rect">
             <a:avLst/>
@@ -5358,43 +5358,17 @@
               <a:rPr lang="ja-JP" altLang="en-US"/>
               <a:t>ネットワーク動態に注目</a:t>
             </a:r>
-            <a:endParaRPr kumimoji="1" lang="ja-JP" altLang="en-US"/>
-          </a:p>
-        </p:txBody>
-      </p:sp>
-      <p:sp>
-        <p:nvSpPr>
-          <p:cNvPr id="3" name="テキスト ボックス 2">
-            <a:extLst>
-              <a:ext uri="{FF2B5EF4-FFF2-40B4-BE49-F238E27FC236}">
-                <a16:creationId xmlns:a16="http://schemas.microsoft.com/office/drawing/2014/main" id="{4A1078AC-213C-46CB-1E78-E61973D50081}"/>
-              </a:ext>
-            </a:extLst>
-          </p:cNvPr>
-          <p:cNvSpPr txBox="1"/>
-          <p:nvPr/>
-        </p:nvSpPr>
-        <p:spPr>
-          <a:xfrm>
-            <a:off x="0" y="2079917"/>
-            <a:ext cx="12192000" cy="3416320"/>
-          </a:xfrm>
-          <a:prstGeom prst="rect">
-            <a:avLst/>
-          </a:prstGeom>
-          <a:noFill/>
-        </p:spPr>
-        <p:txBody>
-          <a:bodyPr wrap="square" rtlCol="0">
-            <a:spAutoFit/>
-          </a:bodyPr>
-          <a:lstStyle/>
-          <a:p>
-            <a:r>
-              <a:rPr kumimoji="1" lang="ja-JP" altLang="en-US"/>
-              <a:t>引用減衰にかかる研究</a:t>
-            </a:r>
+            <a:endParaRPr lang="en-US" altLang="ja-JP"/>
+          </a:p>
+          <a:p>
             <a:endParaRPr kumimoji="1" lang="en-US" altLang="ja-JP"/>
+          </a:p>
+          <a:p>
+            <a:r>
+              <a:rPr lang="ja-JP" altLang="en-US"/>
+              <a:t>引用減衰にかかる代表的な研究</a:t>
+            </a:r>
+            <a:endParaRPr lang="en-US" altLang="ja-JP"/>
           </a:p>
           <a:p>
             <a:pPr marL="285750" indent="-285750">
@@ -5513,6 +5487,16 @@
               <a:rPr lang="en-US" altLang="ja-JP"/>
               <a:t>citation age</a:t>
             </a:r>
+          </a:p>
+          <a:p>
+            <a:endParaRPr lang="en-US" altLang="ja-JP"/>
+          </a:p>
+          <a:p>
+            <a:r>
+              <a:rPr lang="ja-JP" altLang="en-US"/>
+              <a:t>長期の観察に基づく分析は定期的に行われる</a:t>
+            </a:r>
+            <a:endParaRPr lang="en-US" altLang="ja-JP"/>
           </a:p>
         </p:txBody>
       </p:sp>
@@ -5606,7 +5590,7 @@
         <p:spPr>
           <a:xfrm>
             <a:off x="0" y="523220"/>
-            <a:ext cx="12192000" cy="1200329"/>
+            <a:ext cx="12192000" cy="1477328"/>
           </a:xfrm>
           <a:prstGeom prst="rect">
             <a:avLst/>
@@ -5621,7 +5605,7 @@
           <a:p>
             <a:r>
               <a:rPr lang="ja-JP" altLang="en-US"/>
-              <a:t>既存の指標のみからでは見えにくい被引用数の変動やこれによる順位の変動のようなダイナミクスを観察する</a:t>
+              <a:t>既存の指標のみからでは見えにくい、長期にわたる被引用数の変動やこれによる順位の変動のようなダイナミクスを観察する</a:t>
             </a:r>
             <a:endParaRPr lang="en-US" altLang="ja-JP"/>
           </a:p>
@@ -6281,7 +6265,7 @@
         </p:nvSpPr>
         <p:spPr>
           <a:xfrm>
-            <a:off x="8486325" y="2660797"/>
+            <a:off x="8577625" y="2660797"/>
             <a:ext cx="2231701" cy="830997"/>
           </a:xfrm>
           <a:prstGeom prst="rect">
@@ -6363,7 +6347,7 @@
         </p:nvSpPr>
         <p:spPr>
           <a:xfrm>
-            <a:off x="8636134" y="4427995"/>
+            <a:off x="8636135" y="4427995"/>
             <a:ext cx="2114681" cy="830997"/>
           </a:xfrm>
           <a:prstGeom prst="rect">
@@ -6434,11 +6418,11 @@
         <p:spPr>
           <a:xfrm flipV="1">
             <a:off x="4111152" y="4843494"/>
-            <a:ext cx="4524982" cy="302331"/>
+            <a:ext cx="4524983" cy="302331"/>
           </a:xfrm>
           <a:prstGeom prst="bentConnector3">
             <a:avLst>
-              <a:gd name="adj1" fmla="val 55155"/>
+              <a:gd name="adj1" fmla="val 50000"/>
             </a:avLst>
           </a:prstGeom>
           <a:ln w="12700">
@@ -6580,7 +6564,7 @@
           </a:xfrm>
           <a:prstGeom prst="bentConnector3">
             <a:avLst>
-              <a:gd name="adj1" fmla="val 47531"/>
+              <a:gd name="adj1" fmla="val 48338"/>
             </a:avLst>
           </a:prstGeom>
           <a:ln w="12700">
@@ -6829,7 +6813,7 @@
         <p:spPr>
           <a:xfrm>
             <a:off x="5043320" y="3076296"/>
-            <a:ext cx="3443005" cy="0"/>
+            <a:ext cx="3534305" cy="0"/>
           </a:xfrm>
           <a:prstGeom prst="straightConnector1">
             <a:avLst/>
@@ -7352,7 +7336,7 @@
         </p:nvSpPr>
         <p:spPr>
           <a:xfrm>
-            <a:off x="4127357" y="3436416"/>
+            <a:off x="3260427" y="2240570"/>
             <a:ext cx="973343" cy="276999"/>
           </a:xfrm>
           <a:prstGeom prst="rect">
@@ -7374,54 +7358,6 @@
           </a:p>
         </p:txBody>
       </p:sp>
-      <p:cxnSp>
-        <p:nvCxnSpPr>
-          <p:cNvPr id="16" name="カギ線コネクタ 15">
-            <a:extLst>
-              <a:ext uri="{FF2B5EF4-FFF2-40B4-BE49-F238E27FC236}">
-                <a16:creationId xmlns:a16="http://schemas.microsoft.com/office/drawing/2014/main" id="{A7A0326C-5220-83E2-5E5C-5397C0C87E5F}"/>
-              </a:ext>
-            </a:extLst>
-          </p:cNvPr>
-          <p:cNvCxnSpPr>
-            <a:cxnSpLocks/>
-            <a:stCxn id="14" idx="0"/>
-            <a:endCxn id="13" idx="1"/>
-          </p:cNvCxnSpPr>
-          <p:nvPr/>
-        </p:nvCxnSpPr>
-        <p:spPr>
-          <a:xfrm rot="16200000" flipV="1">
-            <a:off x="3979653" y="2802039"/>
-            <a:ext cx="401824" cy="866929"/>
-          </a:xfrm>
-          <a:prstGeom prst="bentConnector3">
-            <a:avLst>
-              <a:gd name="adj1" fmla="val 145520"/>
-            </a:avLst>
-          </a:prstGeom>
-          <a:ln w="12700">
-            <a:solidFill>
-              <a:schemeClr val="tx1"/>
-            </a:solidFill>
-            <a:tailEnd type="triangle"/>
-          </a:ln>
-        </p:spPr>
-        <p:style>
-          <a:lnRef idx="2">
-            <a:schemeClr val="accent1"/>
-          </a:lnRef>
-          <a:fillRef idx="0">
-            <a:schemeClr val="accent1"/>
-          </a:fillRef>
-          <a:effectRef idx="1">
-            <a:schemeClr val="accent1"/>
-          </a:effectRef>
-          <a:fontRef idx="minor">
-            <a:schemeClr val="tx1"/>
-          </a:fontRef>
-        </p:style>
-      </p:cxnSp>
       <p:sp>
         <p:nvSpPr>
           <p:cNvPr id="19" name="テキスト ボックス 18">
@@ -7729,6 +7665,51 @@
           </a:p>
         </p:txBody>
       </p:sp>
+      <p:cxnSp>
+        <p:nvCxnSpPr>
+          <p:cNvPr id="6" name="直線矢印コネクタ 5">
+            <a:extLst>
+              <a:ext uri="{FF2B5EF4-FFF2-40B4-BE49-F238E27FC236}">
+                <a16:creationId xmlns:a16="http://schemas.microsoft.com/office/drawing/2014/main" id="{E2E6166F-0040-5E8C-BB55-8E354D71EDBA}"/>
+              </a:ext>
+            </a:extLst>
+          </p:cNvPr>
+          <p:cNvCxnSpPr>
+            <a:stCxn id="14" idx="2"/>
+            <a:endCxn id="13" idx="1"/>
+          </p:cNvCxnSpPr>
+          <p:nvPr/>
+        </p:nvCxnSpPr>
+        <p:spPr>
+          <a:xfrm>
+            <a:off x="3747099" y="2517569"/>
+            <a:ext cx="1" cy="517023"/>
+          </a:xfrm>
+          <a:prstGeom prst="straightConnector1">
+            <a:avLst/>
+          </a:prstGeom>
+          <a:ln w="12700">
+            <a:solidFill>
+              <a:schemeClr val="tx1"/>
+            </a:solidFill>
+            <a:tailEnd type="triangle"/>
+          </a:ln>
+        </p:spPr>
+        <p:style>
+          <a:lnRef idx="2">
+            <a:schemeClr val="accent1"/>
+          </a:lnRef>
+          <a:fillRef idx="0">
+            <a:schemeClr val="accent1"/>
+          </a:fillRef>
+          <a:effectRef idx="1">
+            <a:schemeClr val="accent1"/>
+          </a:effectRef>
+          <a:fontRef idx="minor">
+            <a:schemeClr val="tx1"/>
+          </a:fontRef>
+        </p:style>
+      </p:cxnSp>
     </p:spTree>
     <p:extLst>
       <p:ext uri="{BB962C8B-B14F-4D97-AF65-F5344CB8AC3E}">

--- a/202312/MIS41.pptx
+++ b/202312/MIS41.pptx
@@ -206,7 +206,7 @@
           </a:lstStyle>
           <a:p>
             <a:fld id="{EC76ED7C-0D2F-D44D-81F8-4029A7FBE0FF}" type="datetimeFigureOut">
-              <a:t>2026/5/14</a:t>
+              <a:t>2026/5/19</a:t>
             </a:fld>
             <a:endParaRPr kumimoji="1" lang="ja-JP" altLang="en-US"/>
           </a:p>
@@ -733,7 +733,7 @@
           <a:lstStyle/>
           <a:p>
             <a:fld id="{B6986787-D869-A342-B24E-761DB6FBB920}" type="datetimeFigureOut">
-              <a:t>2026/5/14</a:t>
+              <a:t>2026/5/19</a:t>
             </a:fld>
             <a:endParaRPr kumimoji="1" lang="ja-JP" altLang="en-US"/>
           </a:p>
@@ -961,7 +961,7 @@
           <a:lstStyle/>
           <a:p>
             <a:fld id="{B6986787-D869-A342-B24E-761DB6FBB920}" type="datetimeFigureOut">
-              <a:t>2026/5/14</a:t>
+              <a:t>2026/5/19</a:t>
             </a:fld>
             <a:endParaRPr kumimoji="1" lang="ja-JP" altLang="en-US"/>
           </a:p>
@@ -1199,7 +1199,7 @@
           <a:lstStyle/>
           <a:p>
             <a:fld id="{B6986787-D869-A342-B24E-761DB6FBB920}" type="datetimeFigureOut">
-              <a:t>2026/5/14</a:t>
+              <a:t>2026/5/19</a:t>
             </a:fld>
             <a:endParaRPr kumimoji="1" lang="ja-JP" altLang="en-US"/>
           </a:p>
@@ -1427,7 +1427,7 @@
           <a:lstStyle/>
           <a:p>
             <a:fld id="{B6986787-D869-A342-B24E-761DB6FBB920}" type="datetimeFigureOut">
-              <a:t>2026/5/14</a:t>
+              <a:t>2026/5/19</a:t>
             </a:fld>
             <a:endParaRPr kumimoji="1" lang="ja-JP" altLang="en-US"/>
           </a:p>
@@ -1700,7 +1700,7 @@
           <a:lstStyle/>
           <a:p>
             <a:fld id="{B6986787-D869-A342-B24E-761DB6FBB920}" type="datetimeFigureOut">
-              <a:t>2026/5/14</a:t>
+              <a:t>2026/5/19</a:t>
             </a:fld>
             <a:endParaRPr kumimoji="1" lang="ja-JP" altLang="en-US"/>
           </a:p>
@@ -2027,7 +2027,7 @@
           <a:lstStyle/>
           <a:p>
             <a:fld id="{B6986787-D869-A342-B24E-761DB6FBB920}" type="datetimeFigureOut">
-              <a:t>2026/5/14</a:t>
+              <a:t>2026/5/19</a:t>
             </a:fld>
             <a:endParaRPr kumimoji="1" lang="ja-JP" altLang="en-US"/>
           </a:p>
@@ -2501,7 +2501,7 @@
           <a:lstStyle/>
           <a:p>
             <a:fld id="{B6986787-D869-A342-B24E-761DB6FBB920}" type="datetimeFigureOut">
-              <a:t>2026/5/14</a:t>
+              <a:t>2026/5/19</a:t>
             </a:fld>
             <a:endParaRPr kumimoji="1" lang="ja-JP" altLang="en-US"/>
           </a:p>
@@ -2640,7 +2640,7 @@
           <a:lstStyle/>
           <a:p>
             <a:fld id="{B6986787-D869-A342-B24E-761DB6FBB920}" type="datetimeFigureOut">
-              <a:t>2026/5/14</a:t>
+              <a:t>2026/5/19</a:t>
             </a:fld>
             <a:endParaRPr kumimoji="1" lang="ja-JP" altLang="en-US"/>
           </a:p>
@@ -2751,7 +2751,7 @@
           <a:lstStyle/>
           <a:p>
             <a:fld id="{B6986787-D869-A342-B24E-761DB6FBB920}" type="datetimeFigureOut">
-              <a:t>2026/5/14</a:t>
+              <a:t>2026/5/19</a:t>
             </a:fld>
             <a:endParaRPr kumimoji="1" lang="ja-JP" altLang="en-US"/>
           </a:p>
@@ -3092,7 +3092,7 @@
           <a:lstStyle/>
           <a:p>
             <a:fld id="{B6986787-D869-A342-B24E-761DB6FBB920}" type="datetimeFigureOut">
-              <a:t>2026/5/14</a:t>
+              <a:t>2026/5/19</a:t>
             </a:fld>
             <a:endParaRPr kumimoji="1" lang="ja-JP" altLang="en-US"/>
           </a:p>
@@ -3378,7 +3378,7 @@
           <a:lstStyle/>
           <a:p>
             <a:fld id="{B6986787-D869-A342-B24E-761DB6FBB920}" type="datetimeFigureOut">
-              <a:t>2026/5/14</a:t>
+              <a:t>2026/5/19</a:t>
             </a:fld>
             <a:endParaRPr kumimoji="1" lang="ja-JP" altLang="en-US"/>
           </a:p>
@@ -3649,7 +3649,7 @@
           </a:lstStyle>
           <a:p>
             <a:fld id="{B6986787-D869-A342-B24E-761DB6FBB920}" type="datetimeFigureOut">
-              <a:t>2026/5/14</a:t>
+              <a:t>2026/5/19</a:t>
             </a:fld>
             <a:endParaRPr kumimoji="1" lang="ja-JP" altLang="en-US"/>
           </a:p>
@@ -5232,7 +5232,7 @@
           <a:p>
             <a:r>
               <a:rPr lang="ja-JP" altLang="en-US" sz="2800"/>
-              <a:t>関連研究・背景</a:t>
+              <a:t>関連研究</a:t>
             </a:r>
             <a:endParaRPr kumimoji="1" lang="ja-JP" altLang="en-US" sz="2800"/>
           </a:p>
@@ -5253,7 +5253,7 @@
         <p:spPr>
           <a:xfrm>
             <a:off x="0" y="523220"/>
-            <a:ext cx="12192000" cy="5355312"/>
+            <a:ext cx="12192000" cy="1200329"/>
           </a:xfrm>
           <a:prstGeom prst="rect">
             <a:avLst/>
@@ -5358,17 +5358,43 @@
               <a:rPr lang="ja-JP" altLang="en-US"/>
               <a:t>ネットワーク動態に注目</a:t>
             </a:r>
-            <a:endParaRPr lang="en-US" altLang="ja-JP"/>
-          </a:p>
-          <a:p>
+            <a:endParaRPr kumimoji="1" lang="ja-JP" altLang="en-US"/>
+          </a:p>
+        </p:txBody>
+      </p:sp>
+      <p:sp>
+        <p:nvSpPr>
+          <p:cNvPr id="3" name="テキスト ボックス 2">
+            <a:extLst>
+              <a:ext uri="{FF2B5EF4-FFF2-40B4-BE49-F238E27FC236}">
+                <a16:creationId xmlns:a16="http://schemas.microsoft.com/office/drawing/2014/main" id="{4A1078AC-213C-46CB-1E78-E61973D50081}"/>
+              </a:ext>
+            </a:extLst>
+          </p:cNvPr>
+          <p:cNvSpPr txBox="1"/>
+          <p:nvPr/>
+        </p:nvSpPr>
+        <p:spPr>
+          <a:xfrm>
+            <a:off x="0" y="2079917"/>
+            <a:ext cx="12192000" cy="4247317"/>
+          </a:xfrm>
+          <a:prstGeom prst="rect">
+            <a:avLst/>
+          </a:prstGeom>
+          <a:noFill/>
+        </p:spPr>
+        <p:txBody>
+          <a:bodyPr wrap="square" rtlCol="0">
+            <a:spAutoFit/>
+          </a:bodyPr>
+          <a:lstStyle/>
+          <a:p>
+            <a:r>
+              <a:rPr kumimoji="1" lang="ja-JP" altLang="en-US"/>
+              <a:t>引用減衰にかかる研究</a:t>
+            </a:r>
             <a:endParaRPr kumimoji="1" lang="en-US" altLang="ja-JP"/>
-          </a:p>
-          <a:p>
-            <a:r>
-              <a:rPr lang="ja-JP" altLang="en-US"/>
-              <a:t>引用減衰にかかる代表的な研究</a:t>
-            </a:r>
-            <a:endParaRPr lang="en-US" altLang="ja-JP"/>
           </a:p>
           <a:p>
             <a:pPr marL="285750" indent="-285750">
@@ -5489,12 +5515,31 @@
             </a:r>
           </a:p>
           <a:p>
-            <a:endParaRPr lang="en-US" altLang="ja-JP"/>
-          </a:p>
-          <a:p>
+            <a:pPr marL="285750" indent="-285750">
+              <a:buFont typeface="Arial" panose="020B0604020202020204" pitchFamily="34" charset="0"/>
+              <a:buChar char="•"/>
+            </a:pPr>
+            <a:r>
+              <a:rPr lang="en-US" altLang="ja-JP"/>
+              <a:t>M. Wang, G. Yu, D. Yu. Effect of the age of papers on the preferential attachment in citation networks. </a:t>
+            </a:r>
+            <a:r>
+              <a:rPr lang="en-US" altLang="ja-JP" i="1"/>
+              <a:t>Physica A: Statistical Mechanics and its Applications</a:t>
+            </a:r>
+            <a:r>
+              <a:rPr lang="en-US" altLang="ja-JP"/>
+              <a:t> (2009).</a:t>
+            </a:r>
+          </a:p>
+          <a:p>
+            <a:pPr marL="742950" lvl="1" indent="-285750">
+              <a:buFont typeface="Arial" panose="020B0604020202020204" pitchFamily="34" charset="0"/>
+              <a:buChar char="•"/>
+            </a:pPr>
             <a:r>
               <a:rPr lang="ja-JP" altLang="en-US"/>
-              <a:t>長期の観察に基づく分析は定期的に行われる</a:t>
+              <a:t>ネットワークモデル（優先的選択）に基づく</a:t>
             </a:r>
             <a:endParaRPr lang="en-US" altLang="ja-JP"/>
           </a:p>
@@ -5590,7 +5635,7 @@
         <p:spPr>
           <a:xfrm>
             <a:off x="0" y="523220"/>
-            <a:ext cx="12192000" cy="1477328"/>
+            <a:ext cx="12192000" cy="1200329"/>
           </a:xfrm>
           <a:prstGeom prst="rect">
             <a:avLst/>
@@ -5605,7 +5650,7 @@
           <a:p>
             <a:r>
               <a:rPr lang="ja-JP" altLang="en-US"/>
-              <a:t>既存の指標のみからでは見えにくい、長期にわたる被引用数の変動やこれによる順位の変動のようなダイナミクスを観察する</a:t>
+              <a:t>既存の指標のみからでは見えにくい被引用数の変動やこれによる順位の変動のようなダイナミクスを観察する</a:t>
             </a:r>
             <a:endParaRPr lang="en-US" altLang="ja-JP"/>
           </a:p>
@@ -6265,7 +6310,7 @@
         </p:nvSpPr>
         <p:spPr>
           <a:xfrm>
-            <a:off x="8577625" y="2660797"/>
+            <a:off x="8486325" y="2660797"/>
             <a:ext cx="2231701" cy="830997"/>
           </a:xfrm>
           <a:prstGeom prst="rect">
@@ -6347,7 +6392,7 @@
         </p:nvSpPr>
         <p:spPr>
           <a:xfrm>
-            <a:off x="8636135" y="4427995"/>
+            <a:off x="8636134" y="4427995"/>
             <a:ext cx="2114681" cy="830997"/>
           </a:xfrm>
           <a:prstGeom prst="rect">
@@ -6418,11 +6463,11 @@
         <p:spPr>
           <a:xfrm flipV="1">
             <a:off x="4111152" y="4843494"/>
-            <a:ext cx="4524983" cy="302331"/>
+            <a:ext cx="4524982" cy="302331"/>
           </a:xfrm>
           <a:prstGeom prst="bentConnector3">
             <a:avLst>
-              <a:gd name="adj1" fmla="val 50000"/>
+              <a:gd name="adj1" fmla="val 55155"/>
             </a:avLst>
           </a:prstGeom>
           <a:ln w="12700">
@@ -6564,7 +6609,7 @@
           </a:xfrm>
           <a:prstGeom prst="bentConnector3">
             <a:avLst>
-              <a:gd name="adj1" fmla="val 48338"/>
+              <a:gd name="adj1" fmla="val 47531"/>
             </a:avLst>
           </a:prstGeom>
           <a:ln w="12700">
@@ -6813,7 +6858,7 @@
         <p:spPr>
           <a:xfrm>
             <a:off x="5043320" y="3076296"/>
-            <a:ext cx="3534305" cy="0"/>
+            <a:ext cx="3443005" cy="0"/>
           </a:xfrm>
           <a:prstGeom prst="straightConnector1">
             <a:avLst/>
@@ -7336,7 +7381,7 @@
         </p:nvSpPr>
         <p:spPr>
           <a:xfrm>
-            <a:off x="3260427" y="2240570"/>
+            <a:off x="4127357" y="3436416"/>
             <a:ext cx="973343" cy="276999"/>
           </a:xfrm>
           <a:prstGeom prst="rect">
@@ -7358,6 +7403,54 @@
           </a:p>
         </p:txBody>
       </p:sp>
+      <p:cxnSp>
+        <p:nvCxnSpPr>
+          <p:cNvPr id="16" name="カギ線コネクタ 15">
+            <a:extLst>
+              <a:ext uri="{FF2B5EF4-FFF2-40B4-BE49-F238E27FC236}">
+                <a16:creationId xmlns:a16="http://schemas.microsoft.com/office/drawing/2014/main" id="{A7A0326C-5220-83E2-5E5C-5397C0C87E5F}"/>
+              </a:ext>
+            </a:extLst>
+          </p:cNvPr>
+          <p:cNvCxnSpPr>
+            <a:cxnSpLocks/>
+            <a:stCxn id="14" idx="0"/>
+            <a:endCxn id="13" idx="1"/>
+          </p:cNvCxnSpPr>
+          <p:nvPr/>
+        </p:nvCxnSpPr>
+        <p:spPr>
+          <a:xfrm rot="16200000" flipV="1">
+            <a:off x="3979653" y="2802039"/>
+            <a:ext cx="401824" cy="866929"/>
+          </a:xfrm>
+          <a:prstGeom prst="bentConnector3">
+            <a:avLst>
+              <a:gd name="adj1" fmla="val 145520"/>
+            </a:avLst>
+          </a:prstGeom>
+          <a:ln w="12700">
+            <a:solidFill>
+              <a:schemeClr val="tx1"/>
+            </a:solidFill>
+            <a:tailEnd type="triangle"/>
+          </a:ln>
+        </p:spPr>
+        <p:style>
+          <a:lnRef idx="2">
+            <a:schemeClr val="accent1"/>
+          </a:lnRef>
+          <a:fillRef idx="0">
+            <a:schemeClr val="accent1"/>
+          </a:fillRef>
+          <a:effectRef idx="1">
+            <a:schemeClr val="accent1"/>
+          </a:effectRef>
+          <a:fontRef idx="minor">
+            <a:schemeClr val="tx1"/>
+          </a:fontRef>
+        </p:style>
+      </p:cxnSp>
       <p:sp>
         <p:nvSpPr>
           <p:cNvPr id="19" name="テキスト ボックス 18">
@@ -7665,51 +7758,6 @@
           </a:p>
         </p:txBody>
       </p:sp>
-      <p:cxnSp>
-        <p:nvCxnSpPr>
-          <p:cNvPr id="6" name="直線矢印コネクタ 5">
-            <a:extLst>
-              <a:ext uri="{FF2B5EF4-FFF2-40B4-BE49-F238E27FC236}">
-                <a16:creationId xmlns:a16="http://schemas.microsoft.com/office/drawing/2014/main" id="{E2E6166F-0040-5E8C-BB55-8E354D71EDBA}"/>
-              </a:ext>
-            </a:extLst>
-          </p:cNvPr>
-          <p:cNvCxnSpPr>
-            <a:stCxn id="14" idx="2"/>
-            <a:endCxn id="13" idx="1"/>
-          </p:cNvCxnSpPr>
-          <p:nvPr/>
-        </p:nvCxnSpPr>
-        <p:spPr>
-          <a:xfrm>
-            <a:off x="3747099" y="2517569"/>
-            <a:ext cx="1" cy="517023"/>
-          </a:xfrm>
-          <a:prstGeom prst="straightConnector1">
-            <a:avLst/>
-          </a:prstGeom>
-          <a:ln w="12700">
-            <a:solidFill>
-              <a:schemeClr val="tx1"/>
-            </a:solidFill>
-            <a:tailEnd type="triangle"/>
-          </a:ln>
-        </p:spPr>
-        <p:style>
-          <a:lnRef idx="2">
-            <a:schemeClr val="accent1"/>
-          </a:lnRef>
-          <a:fillRef idx="0">
-            <a:schemeClr val="accent1"/>
-          </a:fillRef>
-          <a:effectRef idx="1">
-            <a:schemeClr val="accent1"/>
-          </a:effectRef>
-          <a:fontRef idx="minor">
-            <a:schemeClr val="tx1"/>
-          </a:fontRef>
-        </p:style>
-      </p:cxnSp>
     </p:spTree>
     <p:extLst>
       <p:ext uri="{BB962C8B-B14F-4D97-AF65-F5344CB8AC3E}">
@@ -8307,17 +8355,17 @@
           <a:p>
             <a:r>
               <a:rPr kumimoji="1" lang="ja-JP" altLang="en-US"/>
-              <a:t>上位</a:t>
-            </a:r>
-            <a:r>
-              <a:rPr kumimoji="1" lang="en-US" altLang="ja-JP" dirty="0"/>
+              <a:t>被引用数累計上位</a:t>
+            </a:r>
+            <a:r>
+              <a:rPr kumimoji="1" lang="en-US" altLang="ja-JP"/>
               <a:t>1000</a:t>
             </a:r>
             <a:r>
               <a:rPr lang="ja-JP" altLang="en-US"/>
               <a:t>論文以外</a:t>
             </a:r>
-            <a:endParaRPr lang="en-US" altLang="ja-JP" dirty="0"/>
+            <a:endParaRPr lang="en-US" altLang="ja-JP"/>
           </a:p>
           <a:p>
             <a:pPr marL="285750" indent="-285750">
@@ -8325,7 +8373,7 @@
               <a:buChar char="•"/>
             </a:pPr>
             <a:r>
-              <a:rPr kumimoji="1" lang="en-US" altLang="ja-JP" dirty="0"/>
+              <a:rPr kumimoji="1" lang="en-US" altLang="ja-JP"/>
               <a:t>4</a:t>
             </a:r>
             <a:r>
@@ -8333,7 +8381,7 @@
               <a:t>分位区間それぞれの上位</a:t>
             </a:r>
             <a:r>
-              <a:rPr kumimoji="1" lang="en-US" altLang="ja-JP" dirty="0"/>
+              <a:rPr kumimoji="1" lang="en-US" altLang="ja-JP"/>
               <a:t>1000</a:t>
             </a:r>
             <a:r>
@@ -8344,7 +8392,7 @@
               <a:rPr lang="ja-JP" altLang="en-US"/>
               <a:t>したが</a:t>
             </a:r>
-            <a:endParaRPr kumimoji="1" lang="en-US" altLang="ja-JP" dirty="0"/>
+            <a:endParaRPr kumimoji="1" lang="en-US" altLang="ja-JP"/>
           </a:p>
           <a:p>
             <a:pPr marL="285750" indent="-285750">
@@ -8356,14 +8404,14 @@
               <a:t>第</a:t>
             </a:r>
             <a:r>
-              <a:rPr lang="en-US" altLang="ja-JP" dirty="0"/>
+              <a:rPr lang="en-US" altLang="ja-JP"/>
               <a:t>2~4</a:t>
             </a:r>
             <a:r>
               <a:rPr lang="ja-JP" altLang="en-US"/>
               <a:t>分位区間では</a:t>
             </a:r>
-            <a:endParaRPr lang="en-US" altLang="ja-JP" dirty="0"/>
+            <a:endParaRPr lang="en-US" altLang="ja-JP"/>
           </a:p>
           <a:p>
             <a:pPr marL="742950" lvl="1" indent="-285750">
@@ -8375,14 +8423,14 @@
               <a:t>被引用数が少ない（</a:t>
             </a:r>
             <a:r>
-              <a:rPr kumimoji="1" lang="en-US" altLang="ja-JP" dirty="0"/>
+              <a:rPr kumimoji="1" lang="en-US" altLang="ja-JP"/>
               <a:t>2~11</a:t>
             </a:r>
             <a:r>
               <a:rPr kumimoji="1" lang="ja-JP" altLang="en-US"/>
               <a:t>）</a:t>
             </a:r>
-            <a:endParaRPr kumimoji="1" lang="en-US" altLang="ja-JP" dirty="0"/>
+            <a:endParaRPr kumimoji="1" lang="en-US" altLang="ja-JP"/>
           </a:p>
           <a:p>
             <a:pPr marL="742950" lvl="1" indent="-285750">
@@ -8394,7 +8442,7 @@
               <a:t>区間内論文の被引用数が全て同じ（</a:t>
             </a:r>
             <a:r>
-              <a:rPr lang="en-US" altLang="ja-JP" dirty="0"/>
+              <a:rPr lang="en-US" altLang="ja-JP"/>
               <a:t>2</a:t>
             </a:r>
             <a:r>
@@ -8402,7 +8450,7 @@
               <a:t>、</a:t>
             </a:r>
             <a:r>
-              <a:rPr lang="en-US" altLang="ja-JP" dirty="0"/>
+              <a:rPr lang="en-US" altLang="ja-JP"/>
               <a:t>4</a:t>
             </a:r>
             <a:r>
@@ -8410,14 +8458,14 @@
               <a:t>、</a:t>
             </a:r>
             <a:r>
-              <a:rPr lang="en-US" altLang="ja-JP" dirty="0"/>
+              <a:rPr lang="en-US" altLang="ja-JP"/>
               <a:t>11</a:t>
             </a:r>
             <a:r>
               <a:rPr lang="ja-JP" altLang="en-US"/>
               <a:t>）</a:t>
             </a:r>
-            <a:endParaRPr kumimoji="1" lang="en-US" altLang="ja-JP" dirty="0"/>
+            <a:endParaRPr kumimoji="1" lang="en-US" altLang="ja-JP"/>
           </a:p>
           <a:p>
             <a:r>

--- a/202312/MIS41.pptx
+++ b/202312/MIS41.pptx
@@ -5521,7 +5521,7 @@
             </a:pPr>
             <a:r>
               <a:rPr lang="en-US" altLang="ja-JP"/>
-              <a:t>M. Wang, G. Yu, D. Yu. Effect of the age of papers on the preferential attachment in citation networks. </a:t>
+              <a:t>M. Wang; G. Yu; D. Yu. Effect of the age of papers on the preferential attachment in citation networks. </a:t>
             </a:r>
             <a:r>
               <a:rPr lang="en-US" altLang="ja-JP" i="1"/>

--- a/202312/MIS41.pptx
+++ b/202312/MIS41.pptx
@@ -5376,7 +5376,7 @@
         </p:nvSpPr>
         <p:spPr>
           <a:xfrm>
-            <a:off x="0" y="2079917"/>
+            <a:off x="0" y="1941900"/>
             <a:ext cx="12192000" cy="4247317"/>
           </a:xfrm>
           <a:prstGeom prst="rect">
@@ -5402,16 +5402,8 @@
               <a:buChar char="•"/>
             </a:pPr>
             <a:r>
-              <a:rPr lang="en" altLang="ja-JP"/>
-              <a:t>Price, D. J. de Solla. Networks of Scientific Papers. </a:t>
-            </a:r>
-            <a:r>
-              <a:rPr lang="en" altLang="ja-JP" i="1"/>
-              <a:t>Science</a:t>
-            </a:r>
-            <a:r>
-              <a:rPr lang="en" altLang="ja-JP"/>
-              <a:t> (1965).</a:t>
+              <a:rPr lang="en-US" altLang="ja-JP"/>
+              <a:t>E. Garfield</a:t>
             </a:r>
           </a:p>
           <a:p>
@@ -5421,9 +5413,29 @@
             </a:pPr>
             <a:r>
               <a:rPr lang="ja-JP" altLang="en-US"/>
-              <a:t>引用の減衰に言及</a:t>
-            </a:r>
-            <a:endParaRPr lang="en" altLang="ja-JP"/>
+              <a:t>分野別の調査</a:t>
+            </a:r>
+            <a:endParaRPr lang="en-US" altLang="ja-JP"/>
+          </a:p>
+          <a:p>
+            <a:pPr marL="742950" lvl="1" indent="-285750">
+              <a:buFont typeface="Arial" panose="020B0604020202020204" pitchFamily="34" charset="0"/>
+              <a:buChar char="•"/>
+            </a:pPr>
+            <a:r>
+              <a:rPr lang="en-US" altLang="ja-JP"/>
+              <a:t>immediacy index</a:t>
+            </a:r>
+          </a:p>
+          <a:p>
+            <a:pPr marL="742950" lvl="1" indent="-285750">
+              <a:buFont typeface="Arial" panose="020B0604020202020204" pitchFamily="34" charset="0"/>
+              <a:buChar char="•"/>
+            </a:pPr>
+            <a:r>
+              <a:rPr lang="en-US" altLang="ja-JP"/>
+              <a:t>citation age</a:t>
+            </a:r>
           </a:p>
           <a:p>
             <a:pPr marL="285750" indent="-285750">
@@ -5442,6 +5454,7 @@
               <a:rPr lang="en" altLang="ja-JP"/>
               <a:t>(1960).</a:t>
             </a:r>
+            <a:endParaRPr kumimoji="1" lang="en-US" altLang="ja-JP"/>
           </a:p>
           <a:p>
             <a:pPr marL="285750" indent="-285750">
@@ -5449,18 +5462,17 @@
               <a:buChar char="•"/>
             </a:pPr>
             <a:r>
-              <a:rPr lang="en-US" altLang="ja-JP"/>
-              <a:t>Parolo, Pietro Della Briotta; Pan, Raj Kumar; Ghosh, Rumi; Huberman, Bernardo A.; Kaski, Kimmo; Fortunato, Santo. Attention decay in science. </a:t>
-            </a:r>
-            <a:r>
-              <a:rPr lang="en-US" altLang="ja-JP" i="1"/>
-              <a:t>Journal of Informatics </a:t>
-            </a:r>
-            <a:r>
-              <a:rPr lang="en-US" altLang="ja-JP"/>
-              <a:t>(2015).</a:t>
-            </a:r>
-            <a:endParaRPr lang="en" altLang="ja-JP"/>
+              <a:rPr lang="en" altLang="ja-JP"/>
+              <a:t>Price, D. J. de Solla. Networks of Scientific Papers. </a:t>
+            </a:r>
+            <a:r>
+              <a:rPr lang="en" altLang="ja-JP" i="1"/>
+              <a:t>Science</a:t>
+            </a:r>
+            <a:r>
+              <a:rPr lang="en" altLang="ja-JP"/>
+              <a:t> (1965).</a:t>
+            </a:r>
           </a:p>
           <a:p>
             <a:pPr marL="742950" lvl="1" indent="-285750">
@@ -5469,9 +5481,9 @@
             </a:pPr>
             <a:r>
               <a:rPr lang="ja-JP" altLang="en-US"/>
-              <a:t>引用減衰モデル</a:t>
-            </a:r>
-            <a:endParaRPr lang="en-US" altLang="ja-JP"/>
+              <a:t>引用の減衰に言及</a:t>
+            </a:r>
+            <a:endParaRPr lang="en" altLang="ja-JP"/>
           </a:p>
           <a:p>
             <a:pPr marL="285750" indent="-285750">
@@ -5480,8 +5492,17 @@
             </a:pPr>
             <a:r>
               <a:rPr lang="en-US" altLang="ja-JP"/>
-              <a:t>E. Garfield</a:t>
-            </a:r>
+              <a:t>Parolo, Pietro Della Briotta; Pan, Raj Kumar; Ghosh, Rumi; Huberman, Bernardo A.; Kaski, Kimmo; Fortunato, Santo. Attention decay in science. </a:t>
+            </a:r>
+            <a:r>
+              <a:rPr lang="en-US" altLang="ja-JP" i="1"/>
+              <a:t>Journal of Informatics </a:t>
+            </a:r>
+            <a:r>
+              <a:rPr lang="en-US" altLang="ja-JP"/>
+              <a:t>(2015).</a:t>
+            </a:r>
+            <a:endParaRPr lang="en" altLang="ja-JP"/>
           </a:p>
           <a:p>
             <a:pPr marL="742950" lvl="1" indent="-285750">
@@ -5490,9 +5511,27 @@
             </a:pPr>
             <a:r>
               <a:rPr lang="ja-JP" altLang="en-US"/>
-              <a:t>分野別の調査</a:t>
+              <a:t>引用減衰モデル</a:t>
             </a:r>
             <a:endParaRPr lang="en-US" altLang="ja-JP"/>
+          </a:p>
+          <a:p>
+            <a:pPr marL="285750" indent="-285750">
+              <a:buFont typeface="Arial" panose="020B0604020202020204" pitchFamily="34" charset="0"/>
+              <a:buChar char="•"/>
+            </a:pPr>
+            <a:r>
+              <a:rPr lang="en-US" altLang="ja-JP"/>
+              <a:t>A. Garavaglia; R. van der Hofstad; G. Woeginger. The Dynamics of Power laws: Fitness and Aging in Preferential Attachment Trees. </a:t>
+            </a:r>
+            <a:r>
+              <a:rPr lang="en-US" altLang="ja-JP" i="1"/>
+              <a:t>Journal of Statistical Physics</a:t>
+            </a:r>
+            <a:r>
+              <a:rPr lang="en-US" altLang="ja-JP"/>
+              <a:t> (2017).</a:t>
+            </a:r>
           </a:p>
           <a:p>
             <a:pPr marL="742950" lvl="1" indent="-285750">
@@ -5500,46 +5539,8 @@
               <a:buChar char="•"/>
             </a:pPr>
             <a:r>
-              <a:rPr lang="en-US" altLang="ja-JP"/>
-              <a:t>immediacy index</a:t>
-            </a:r>
-          </a:p>
-          <a:p>
-            <a:pPr marL="742950" lvl="1" indent="-285750">
-              <a:buFont typeface="Arial" panose="020B0604020202020204" pitchFamily="34" charset="0"/>
-              <a:buChar char="•"/>
-            </a:pPr>
-            <a:r>
-              <a:rPr lang="en-US" altLang="ja-JP"/>
-              <a:t>citation age</a:t>
-            </a:r>
-          </a:p>
-          <a:p>
-            <a:pPr marL="285750" indent="-285750">
-              <a:buFont typeface="Arial" panose="020B0604020202020204" pitchFamily="34" charset="0"/>
-              <a:buChar char="•"/>
-            </a:pPr>
-            <a:r>
-              <a:rPr lang="en-US" altLang="ja-JP"/>
-              <a:t>M. Wang; G. Yu; D. Yu. Effect of the age of papers on the preferential attachment in citation networks. </a:t>
-            </a:r>
-            <a:r>
-              <a:rPr lang="en-US" altLang="ja-JP" i="1"/>
-              <a:t>Physica A: Statistical Mechanics and its Applications</a:t>
-            </a:r>
-            <a:r>
-              <a:rPr lang="en-US" altLang="ja-JP"/>
-              <a:t> (2009).</a:t>
-            </a:r>
-          </a:p>
-          <a:p>
-            <a:pPr marL="742950" lvl="1" indent="-285750">
-              <a:buFont typeface="Arial" panose="020B0604020202020204" pitchFamily="34" charset="0"/>
-              <a:buChar char="•"/>
-            </a:pPr>
-            <a:r>
               <a:rPr lang="ja-JP" altLang="en-US"/>
-              <a:t>ネットワークモデル（優先的選択）に基づく</a:t>
+              <a:t>ネットワークモデル（優先的選択）の拡張、オブソレッセンスも再現</a:t>
             </a:r>
             <a:endParaRPr lang="en-US" altLang="ja-JP"/>
           </a:p>

--- a/202312/MIS41.pptx
+++ b/202312/MIS41.pptx
@@ -206,7 +206,7 @@
           </a:lstStyle>
           <a:p>
             <a:fld id="{EC76ED7C-0D2F-D44D-81F8-4029A7FBE0FF}" type="datetimeFigureOut">
-              <a:t>2026/5/19</a:t>
+              <a:t>2026/5/26</a:t>
             </a:fld>
             <a:endParaRPr kumimoji="1" lang="ja-JP" altLang="en-US"/>
           </a:p>
@@ -733,7 +733,7 @@
           <a:lstStyle/>
           <a:p>
             <a:fld id="{B6986787-D869-A342-B24E-761DB6FBB920}" type="datetimeFigureOut">
-              <a:t>2026/5/19</a:t>
+              <a:t>2026/5/26</a:t>
             </a:fld>
             <a:endParaRPr kumimoji="1" lang="ja-JP" altLang="en-US"/>
           </a:p>
@@ -961,7 +961,7 @@
           <a:lstStyle/>
           <a:p>
             <a:fld id="{B6986787-D869-A342-B24E-761DB6FBB920}" type="datetimeFigureOut">
-              <a:t>2026/5/19</a:t>
+              <a:t>2026/5/26</a:t>
             </a:fld>
             <a:endParaRPr kumimoji="1" lang="ja-JP" altLang="en-US"/>
           </a:p>
@@ -1199,7 +1199,7 @@
           <a:lstStyle/>
           <a:p>
             <a:fld id="{B6986787-D869-A342-B24E-761DB6FBB920}" type="datetimeFigureOut">
-              <a:t>2026/5/19</a:t>
+              <a:t>2026/5/26</a:t>
             </a:fld>
             <a:endParaRPr kumimoji="1" lang="ja-JP" altLang="en-US"/>
           </a:p>
@@ -1427,7 +1427,7 @@
           <a:lstStyle/>
           <a:p>
             <a:fld id="{B6986787-D869-A342-B24E-761DB6FBB920}" type="datetimeFigureOut">
-              <a:t>2026/5/19</a:t>
+              <a:t>2026/5/26</a:t>
             </a:fld>
             <a:endParaRPr kumimoji="1" lang="ja-JP" altLang="en-US"/>
           </a:p>
@@ -1700,7 +1700,7 @@
           <a:lstStyle/>
           <a:p>
             <a:fld id="{B6986787-D869-A342-B24E-761DB6FBB920}" type="datetimeFigureOut">
-              <a:t>2026/5/19</a:t>
+              <a:t>2026/5/26</a:t>
             </a:fld>
             <a:endParaRPr kumimoji="1" lang="ja-JP" altLang="en-US"/>
           </a:p>
@@ -2027,7 +2027,7 @@
           <a:lstStyle/>
           <a:p>
             <a:fld id="{B6986787-D869-A342-B24E-761DB6FBB920}" type="datetimeFigureOut">
-              <a:t>2026/5/19</a:t>
+              <a:t>2026/5/26</a:t>
             </a:fld>
             <a:endParaRPr kumimoji="1" lang="ja-JP" altLang="en-US"/>
           </a:p>
@@ -2501,7 +2501,7 @@
           <a:lstStyle/>
           <a:p>
             <a:fld id="{B6986787-D869-A342-B24E-761DB6FBB920}" type="datetimeFigureOut">
-              <a:t>2026/5/19</a:t>
+              <a:t>2026/5/26</a:t>
             </a:fld>
             <a:endParaRPr kumimoji="1" lang="ja-JP" altLang="en-US"/>
           </a:p>
@@ -2640,7 +2640,7 @@
           <a:lstStyle/>
           <a:p>
             <a:fld id="{B6986787-D869-A342-B24E-761DB6FBB920}" type="datetimeFigureOut">
-              <a:t>2026/5/19</a:t>
+              <a:t>2026/5/26</a:t>
             </a:fld>
             <a:endParaRPr kumimoji="1" lang="ja-JP" altLang="en-US"/>
           </a:p>
@@ -2751,7 +2751,7 @@
           <a:lstStyle/>
           <a:p>
             <a:fld id="{B6986787-D869-A342-B24E-761DB6FBB920}" type="datetimeFigureOut">
-              <a:t>2026/5/19</a:t>
+              <a:t>2026/5/26</a:t>
             </a:fld>
             <a:endParaRPr kumimoji="1" lang="ja-JP" altLang="en-US"/>
           </a:p>
@@ -3092,7 +3092,7 @@
           <a:lstStyle/>
           <a:p>
             <a:fld id="{B6986787-D869-A342-B24E-761DB6FBB920}" type="datetimeFigureOut">
-              <a:t>2026/5/19</a:t>
+              <a:t>2026/5/26</a:t>
             </a:fld>
             <a:endParaRPr kumimoji="1" lang="ja-JP" altLang="en-US"/>
           </a:p>
@@ -3378,7 +3378,7 @@
           <a:lstStyle/>
           <a:p>
             <a:fld id="{B6986787-D869-A342-B24E-761DB6FBB920}" type="datetimeFigureOut">
-              <a:t>2026/5/19</a:t>
+              <a:t>2026/5/26</a:t>
             </a:fld>
             <a:endParaRPr kumimoji="1" lang="ja-JP" altLang="en-US"/>
           </a:p>
@@ -3649,7 +3649,7 @@
           </a:lstStyle>
           <a:p>
             <a:fld id="{B6986787-D869-A342-B24E-761DB6FBB920}" type="datetimeFigureOut">
-              <a:t>2026/5/19</a:t>
+              <a:t>2026/5/26</a:t>
             </a:fld>
             <a:endParaRPr kumimoji="1" lang="ja-JP" altLang="en-US"/>
           </a:p>
@@ -5684,7 +5684,7 @@
             </a:pPr>
             <a:r>
               <a:rPr lang="ja-JP" altLang="en-US"/>
-              <a:t>多峰性</a:t>
+              <a:t>リバイバル性（被引用の多峰性）と被引用の寿命との関係</a:t>
             </a:r>
           </a:p>
         </p:txBody>
@@ -5820,8 +5820,8 @@
         </p:nvSpPr>
         <p:spPr>
           <a:xfrm>
-            <a:off x="2391634" y="1982740"/>
-            <a:ext cx="2759089" cy="369332"/>
+            <a:off x="2391634" y="1913490"/>
+            <a:ext cx="2759089" cy="646331"/>
           </a:xfrm>
           <a:prstGeom prst="rect">
             <a:avLst/>
@@ -5847,6 +5847,13 @@
               <a:rPr kumimoji="1" lang="ja-JP" altLang="en-US"/>
               <a:t>年出版の論文</a:t>
             </a:r>
+            <a:endParaRPr kumimoji="1" lang="en-US" altLang="ja-JP"/>
+          </a:p>
+          <a:p>
+            <a:r>
+              <a:rPr kumimoji="1" lang="ja-JP" altLang="en-US"/>
+              <a:t>の参照情報</a:t>
+            </a:r>
           </a:p>
         </p:txBody>
       </p:sp>
@@ -5864,7 +5871,7 @@
         </p:nvSpPr>
         <p:spPr>
           <a:xfrm>
-            <a:off x="2499034" y="2891630"/>
+            <a:off x="2499034" y="3021713"/>
             <a:ext cx="2544286" cy="369332"/>
           </a:xfrm>
           <a:prstGeom prst="rect">
@@ -5912,7 +5919,7 @@
         </p:nvSpPr>
         <p:spPr>
           <a:xfrm>
-            <a:off x="1377192" y="3783688"/>
+            <a:off x="1377192" y="3852937"/>
             <a:ext cx="2028884" cy="646331"/>
           </a:xfrm>
           <a:prstGeom prst="rect">
@@ -6038,7 +6045,7 @@
         <p:spPr>
           <a:xfrm>
             <a:off x="3771177" y="1451598"/>
-            <a:ext cx="2" cy="531142"/>
+            <a:ext cx="2" cy="461892"/>
           </a:xfrm>
           <a:prstGeom prst="line">
             <a:avLst/>
@@ -6082,8 +6089,8 @@
         </p:nvCxnSpPr>
         <p:spPr>
           <a:xfrm flipH="1">
-            <a:off x="3771177" y="2352072"/>
-            <a:ext cx="2" cy="539558"/>
+            <a:off x="3771177" y="2559821"/>
+            <a:ext cx="2" cy="461892"/>
           </a:xfrm>
           <a:prstGeom prst="line">
             <a:avLst/>
@@ -6127,12 +6134,12 @@
         </p:nvCxnSpPr>
         <p:spPr>
           <a:xfrm rot="16200000" flipH="1">
-            <a:off x="4207992" y="2824146"/>
-            <a:ext cx="522725" cy="1396355"/>
+            <a:off x="4273033" y="2889188"/>
+            <a:ext cx="392642" cy="1396355"/>
           </a:xfrm>
           <a:prstGeom prst="bentConnector3">
             <a:avLst>
-              <a:gd name="adj1" fmla="val 50000"/>
+              <a:gd name="adj1" fmla="val 58124"/>
             </a:avLst>
           </a:prstGeom>
           <a:ln w="12700">
@@ -6174,8 +6181,8 @@
         </p:nvCxnSpPr>
         <p:spPr>
           <a:xfrm rot="5400000">
-            <a:off x="2820043" y="2832554"/>
-            <a:ext cx="522726" cy="1379543"/>
+            <a:off x="2850460" y="2932220"/>
+            <a:ext cx="461892" cy="1379543"/>
           </a:xfrm>
           <a:prstGeom prst="bentConnector3">
             <a:avLst>
@@ -6226,7 +6233,7 @@
           </a:xfrm>
           <a:prstGeom prst="bentConnector3">
             <a:avLst>
-              <a:gd name="adj1" fmla="val 50000"/>
+              <a:gd name="adj1" fmla="val 56006"/>
             </a:avLst>
           </a:prstGeom>
           <a:ln w="12700">
@@ -6268,8 +6275,8 @@
         </p:nvCxnSpPr>
         <p:spPr>
           <a:xfrm rot="16200000" flipH="1">
-            <a:off x="2824240" y="3997412"/>
-            <a:ext cx="531140" cy="1396353"/>
+            <a:off x="2858865" y="4032036"/>
+            <a:ext cx="461891" cy="1396353"/>
           </a:xfrm>
           <a:prstGeom prst="bentConnector3">
             <a:avLst>
@@ -6311,7 +6318,7 @@
         </p:nvSpPr>
         <p:spPr>
           <a:xfrm>
-            <a:off x="8486325" y="2660797"/>
+            <a:off x="8577625" y="2790994"/>
             <a:ext cx="2231701" cy="830997"/>
           </a:xfrm>
           <a:prstGeom prst="rect">
@@ -6393,7 +6400,7 @@
         </p:nvSpPr>
         <p:spPr>
           <a:xfrm>
-            <a:off x="8636134" y="4427995"/>
+            <a:off x="8636135" y="4427995"/>
             <a:ext cx="2114681" cy="830997"/>
           </a:xfrm>
           <a:prstGeom prst="rect">
@@ -6464,11 +6471,11 @@
         <p:spPr>
           <a:xfrm flipV="1">
             <a:off x="4111152" y="4843494"/>
-            <a:ext cx="4524982" cy="302331"/>
+            <a:ext cx="4524983" cy="302331"/>
           </a:xfrm>
           <a:prstGeom prst="bentConnector3">
             <a:avLst>
-              <a:gd name="adj1" fmla="val 55155"/>
+              <a:gd name="adj1" fmla="val 50000"/>
             </a:avLst>
           </a:prstGeom>
           <a:ln w="12700">
@@ -6508,7 +6515,7 @@
         <p:spPr>
           <a:xfrm>
             <a:off x="5178341" y="2197741"/>
-            <a:ext cx="220351" cy="850851"/>
+            <a:ext cx="233621" cy="890858"/>
           </a:xfrm>
           <a:prstGeom prst="rightBrace">
             <a:avLst/>
@@ -6605,12 +6612,12 @@
         </p:nvCxnSpPr>
         <p:spPr>
           <a:xfrm rot="10800000" flipH="1">
-            <a:off x="5398692" y="1458805"/>
-            <a:ext cx="2392660" cy="1164362"/>
+            <a:off x="5411962" y="1458806"/>
+            <a:ext cx="2379390" cy="1184365"/>
           </a:xfrm>
           <a:prstGeom prst="bentConnector3">
             <a:avLst>
-              <a:gd name="adj1" fmla="val 47531"/>
+              <a:gd name="adj1" fmla="val 35091"/>
             </a:avLst>
           </a:prstGeom>
           <a:ln w="12700">
@@ -6858,8 +6865,8 @@
         </p:nvCxnSpPr>
         <p:spPr>
           <a:xfrm>
-            <a:off x="5043320" y="3076296"/>
-            <a:ext cx="3443005" cy="0"/>
+            <a:off x="5043320" y="3206379"/>
+            <a:ext cx="3534305" cy="114"/>
           </a:xfrm>
           <a:prstGeom prst="straightConnector1">
             <a:avLst/>
@@ -8410,7 +8417,15 @@
             </a:r>
             <a:r>
               <a:rPr lang="ja-JP" altLang="en-US"/>
-              <a:t>分位区間では</a:t>
+              <a:t>分位区間上位</a:t>
+            </a:r>
+            <a:r>
+              <a:rPr lang="en-US" altLang="ja-JP"/>
+              <a:t>1000</a:t>
+            </a:r>
+            <a:r>
+              <a:rPr lang="ja-JP" altLang="en-US"/>
+              <a:t>件では</a:t>
             </a:r>
             <a:endParaRPr lang="en-US" altLang="ja-JP"/>
           </a:p>

--- a/202312/MIS41.pptx
+++ b/202312/MIS41.pptx
@@ -206,7 +206,7 @@
           </a:lstStyle>
           <a:p>
             <a:fld id="{EC76ED7C-0D2F-D44D-81F8-4029A7FBE0FF}" type="datetimeFigureOut">
-              <a:t>2026/5/26</a:t>
+              <a:t>2026/5/27</a:t>
             </a:fld>
             <a:endParaRPr kumimoji="1" lang="ja-JP" altLang="en-US"/>
           </a:p>
@@ -733,7 +733,7 @@
           <a:lstStyle/>
           <a:p>
             <a:fld id="{B6986787-D869-A342-B24E-761DB6FBB920}" type="datetimeFigureOut">
-              <a:t>2026/5/26</a:t>
+              <a:t>2026/5/27</a:t>
             </a:fld>
             <a:endParaRPr kumimoji="1" lang="ja-JP" altLang="en-US"/>
           </a:p>
@@ -961,7 +961,7 @@
           <a:lstStyle/>
           <a:p>
             <a:fld id="{B6986787-D869-A342-B24E-761DB6FBB920}" type="datetimeFigureOut">
-              <a:t>2026/5/26</a:t>
+              <a:t>2026/5/27</a:t>
             </a:fld>
             <a:endParaRPr kumimoji="1" lang="ja-JP" altLang="en-US"/>
           </a:p>
@@ -1199,7 +1199,7 @@
           <a:lstStyle/>
           <a:p>
             <a:fld id="{B6986787-D869-A342-B24E-761DB6FBB920}" type="datetimeFigureOut">
-              <a:t>2026/5/26</a:t>
+              <a:t>2026/5/27</a:t>
             </a:fld>
             <a:endParaRPr kumimoji="1" lang="ja-JP" altLang="en-US"/>
           </a:p>
@@ -1427,7 +1427,7 @@
           <a:lstStyle/>
           <a:p>
             <a:fld id="{B6986787-D869-A342-B24E-761DB6FBB920}" type="datetimeFigureOut">
-              <a:t>2026/5/26</a:t>
+              <a:t>2026/5/27</a:t>
             </a:fld>
             <a:endParaRPr kumimoji="1" lang="ja-JP" altLang="en-US"/>
           </a:p>
@@ -1700,7 +1700,7 @@
           <a:lstStyle/>
           <a:p>
             <a:fld id="{B6986787-D869-A342-B24E-761DB6FBB920}" type="datetimeFigureOut">
-              <a:t>2026/5/26</a:t>
+              <a:t>2026/5/27</a:t>
             </a:fld>
             <a:endParaRPr kumimoji="1" lang="ja-JP" altLang="en-US"/>
           </a:p>
@@ -2027,7 +2027,7 @@
           <a:lstStyle/>
           <a:p>
             <a:fld id="{B6986787-D869-A342-B24E-761DB6FBB920}" type="datetimeFigureOut">
-              <a:t>2026/5/26</a:t>
+              <a:t>2026/5/27</a:t>
             </a:fld>
             <a:endParaRPr kumimoji="1" lang="ja-JP" altLang="en-US"/>
           </a:p>
@@ -2501,7 +2501,7 @@
           <a:lstStyle/>
           <a:p>
             <a:fld id="{B6986787-D869-A342-B24E-761DB6FBB920}" type="datetimeFigureOut">
-              <a:t>2026/5/26</a:t>
+              <a:t>2026/5/27</a:t>
             </a:fld>
             <a:endParaRPr kumimoji="1" lang="ja-JP" altLang="en-US"/>
           </a:p>
@@ -2640,7 +2640,7 @@
           <a:lstStyle/>
           <a:p>
             <a:fld id="{B6986787-D869-A342-B24E-761DB6FBB920}" type="datetimeFigureOut">
-              <a:t>2026/5/26</a:t>
+              <a:t>2026/5/27</a:t>
             </a:fld>
             <a:endParaRPr kumimoji="1" lang="ja-JP" altLang="en-US"/>
           </a:p>
@@ -2751,7 +2751,7 @@
           <a:lstStyle/>
           <a:p>
             <a:fld id="{B6986787-D869-A342-B24E-761DB6FBB920}" type="datetimeFigureOut">
-              <a:t>2026/5/26</a:t>
+              <a:t>2026/5/27</a:t>
             </a:fld>
             <a:endParaRPr kumimoji="1" lang="ja-JP" altLang="en-US"/>
           </a:p>
@@ -3092,7 +3092,7 @@
           <a:lstStyle/>
           <a:p>
             <a:fld id="{B6986787-D869-A342-B24E-761DB6FBB920}" type="datetimeFigureOut">
-              <a:t>2026/5/26</a:t>
+              <a:t>2026/5/27</a:t>
             </a:fld>
             <a:endParaRPr kumimoji="1" lang="ja-JP" altLang="en-US"/>
           </a:p>
@@ -3378,7 +3378,7 @@
           <a:lstStyle/>
           <a:p>
             <a:fld id="{B6986787-D869-A342-B24E-761DB6FBB920}" type="datetimeFigureOut">
-              <a:t>2026/5/26</a:t>
+              <a:t>2026/5/27</a:t>
             </a:fld>
             <a:endParaRPr kumimoji="1" lang="ja-JP" altLang="en-US"/>
           </a:p>
@@ -3649,7 +3649,7 @@
           </a:lstStyle>
           <a:p>
             <a:fld id="{B6986787-D869-A342-B24E-761DB6FBB920}" type="datetimeFigureOut">
-              <a:t>2026/5/26</a:t>
+              <a:t>2026/5/27</a:t>
             </a:fld>
             <a:endParaRPr kumimoji="1" lang="ja-JP" altLang="en-US"/>
           </a:p>

--- a/202312/MIS41.pptx
+++ b/202312/MIS41.pptx
@@ -206,7 +206,7 @@
           </a:lstStyle>
           <a:p>
             <a:fld id="{EC76ED7C-0D2F-D44D-81F8-4029A7FBE0FF}" type="datetimeFigureOut">
-              <a:t>2026/5/27</a:t>
+              <a:t>2026/6/2</a:t>
             </a:fld>
             <a:endParaRPr kumimoji="1" lang="ja-JP" altLang="en-US"/>
           </a:p>
@@ -733,7 +733,7 @@
           <a:lstStyle/>
           <a:p>
             <a:fld id="{B6986787-D869-A342-B24E-761DB6FBB920}" type="datetimeFigureOut">
-              <a:t>2026/5/27</a:t>
+              <a:t>2026/6/2</a:t>
             </a:fld>
             <a:endParaRPr kumimoji="1" lang="ja-JP" altLang="en-US"/>
           </a:p>
@@ -961,7 +961,7 @@
           <a:lstStyle/>
           <a:p>
             <a:fld id="{B6986787-D869-A342-B24E-761DB6FBB920}" type="datetimeFigureOut">
-              <a:t>2026/5/27</a:t>
+              <a:t>2026/6/2</a:t>
             </a:fld>
             <a:endParaRPr kumimoji="1" lang="ja-JP" altLang="en-US"/>
           </a:p>
@@ -1199,7 +1199,7 @@
           <a:lstStyle/>
           <a:p>
             <a:fld id="{B6986787-D869-A342-B24E-761DB6FBB920}" type="datetimeFigureOut">
-              <a:t>2026/5/27</a:t>
+              <a:t>2026/6/2</a:t>
             </a:fld>
             <a:endParaRPr kumimoji="1" lang="ja-JP" altLang="en-US"/>
           </a:p>
@@ -1427,7 +1427,7 @@
           <a:lstStyle/>
           <a:p>
             <a:fld id="{B6986787-D869-A342-B24E-761DB6FBB920}" type="datetimeFigureOut">
-              <a:t>2026/5/27</a:t>
+              <a:t>2026/6/2</a:t>
             </a:fld>
             <a:endParaRPr kumimoji="1" lang="ja-JP" altLang="en-US"/>
           </a:p>
@@ -1700,7 +1700,7 @@
           <a:lstStyle/>
           <a:p>
             <a:fld id="{B6986787-D869-A342-B24E-761DB6FBB920}" type="datetimeFigureOut">
-              <a:t>2026/5/27</a:t>
+              <a:t>2026/6/2</a:t>
             </a:fld>
             <a:endParaRPr kumimoji="1" lang="ja-JP" altLang="en-US"/>
           </a:p>
@@ -2027,7 +2027,7 @@
           <a:lstStyle/>
           <a:p>
             <a:fld id="{B6986787-D869-A342-B24E-761DB6FBB920}" type="datetimeFigureOut">
-              <a:t>2026/5/27</a:t>
+              <a:t>2026/6/2</a:t>
             </a:fld>
             <a:endParaRPr kumimoji="1" lang="ja-JP" altLang="en-US"/>
           </a:p>
@@ -2501,7 +2501,7 @@
           <a:lstStyle/>
           <a:p>
             <a:fld id="{B6986787-D869-A342-B24E-761DB6FBB920}" type="datetimeFigureOut">
-              <a:t>2026/5/27</a:t>
+              <a:t>2026/6/2</a:t>
             </a:fld>
             <a:endParaRPr kumimoji="1" lang="ja-JP" altLang="en-US"/>
           </a:p>
@@ -2640,7 +2640,7 @@
           <a:lstStyle/>
           <a:p>
             <a:fld id="{B6986787-D869-A342-B24E-761DB6FBB920}" type="datetimeFigureOut">
-              <a:t>2026/5/27</a:t>
+              <a:t>2026/6/2</a:t>
             </a:fld>
             <a:endParaRPr kumimoji="1" lang="ja-JP" altLang="en-US"/>
           </a:p>
@@ -2751,7 +2751,7 @@
           <a:lstStyle/>
           <a:p>
             <a:fld id="{B6986787-D869-A342-B24E-761DB6FBB920}" type="datetimeFigureOut">
-              <a:t>2026/5/27</a:t>
+              <a:t>2026/6/2</a:t>
             </a:fld>
             <a:endParaRPr kumimoji="1" lang="ja-JP" altLang="en-US"/>
           </a:p>
@@ -3092,7 +3092,7 @@
           <a:lstStyle/>
           <a:p>
             <a:fld id="{B6986787-D869-A342-B24E-761DB6FBB920}" type="datetimeFigureOut">
-              <a:t>2026/5/27</a:t>
+              <a:t>2026/6/2</a:t>
             </a:fld>
             <a:endParaRPr kumimoji="1" lang="ja-JP" altLang="en-US"/>
           </a:p>
@@ -3378,7 +3378,7 @@
           <a:lstStyle/>
           <a:p>
             <a:fld id="{B6986787-D869-A342-B24E-761DB6FBB920}" type="datetimeFigureOut">
-              <a:t>2026/5/27</a:t>
+              <a:t>2026/6/2</a:t>
             </a:fld>
             <a:endParaRPr kumimoji="1" lang="ja-JP" altLang="en-US"/>
           </a:p>
@@ -3649,7 +3649,7 @@
           </a:lstStyle>
           <a:p>
             <a:fld id="{B6986787-D869-A342-B24E-761DB6FBB920}" type="datetimeFigureOut">
-              <a:t>2026/5/27</a:t>
+              <a:t>2026/6/2</a:t>
             </a:fld>
             <a:endParaRPr kumimoji="1" lang="ja-JP" altLang="en-US"/>
           </a:p>
@@ -5094,7 +5094,7 @@
             </a:pPr>
             <a:r>
               <a:rPr kumimoji="1" lang="ja-JP" altLang="en-US"/>
-              <a:t>この期間は既存の報告と整合的であることから安定していると考えられる</a:t>
+              <a:t>この期間は既存の報告と整合的であることから時代を通して安定していると考えられる</a:t>
             </a:r>
             <a:endParaRPr kumimoji="1" lang="en-US" altLang="ja-JP"/>
           </a:p>
@@ -5105,7 +5105,7 @@
             </a:pPr>
             <a:r>
               <a:rPr lang="ja-JP" altLang="en-US"/>
-              <a:t>オブソレッセンスが確認された論文とそうでない論文の間に多峰性の差は極めて小さく、関係しないものと考えられる</a:t>
+              <a:t>オブソレッセンスが確認された論文とそうでない論文の間に多峰性の差は極めて小さく、モデルとしては関係しないと（揺らぎである）考えられる</a:t>
             </a:r>
             <a:endParaRPr kumimoji="1" lang="ja-JP" altLang="en-US"/>
           </a:p>
@@ -5960,7 +5960,7 @@
         </p:nvSpPr>
         <p:spPr>
           <a:xfrm>
-            <a:off x="4153089" y="3783687"/>
+            <a:off x="4145516" y="3852936"/>
             <a:ext cx="2028885" cy="646331"/>
           </a:xfrm>
           <a:prstGeom prst="rect">
@@ -6134,12 +6134,12 @@
         </p:nvCxnSpPr>
         <p:spPr>
           <a:xfrm rot="16200000" flipH="1">
-            <a:off x="4273033" y="2889188"/>
-            <a:ext cx="392642" cy="1396355"/>
+            <a:off x="4234623" y="2927599"/>
+            <a:ext cx="461891" cy="1388782"/>
           </a:xfrm>
           <a:prstGeom prst="bentConnector3">
             <a:avLst>
-              <a:gd name="adj1" fmla="val 58124"/>
+              <a:gd name="adj1" fmla="val 50000"/>
             </a:avLst>
           </a:prstGeom>
           <a:ln w="12700">
@@ -6228,12 +6228,12 @@
         </p:nvCxnSpPr>
         <p:spPr>
           <a:xfrm rot="5400000">
-            <a:off x="4212190" y="4005816"/>
-            <a:ext cx="531141" cy="1379545"/>
+            <a:off x="4243027" y="4044227"/>
+            <a:ext cx="461892" cy="1371972"/>
           </a:xfrm>
           <a:prstGeom prst="bentConnector3">
             <a:avLst>
-              <a:gd name="adj1" fmla="val 56006"/>
+              <a:gd name="adj1" fmla="val 50000"/>
             </a:avLst>
           </a:prstGeom>
           <a:ln w="12700">
@@ -6514,7 +6514,7 @@
         </p:nvSpPr>
         <p:spPr>
           <a:xfrm>
-            <a:off x="5178341" y="2197741"/>
+            <a:off x="5178341" y="2275375"/>
             <a:ext cx="233621" cy="890858"/>
           </a:xfrm>
           <a:prstGeom prst="rightBrace">
@@ -6564,7 +6564,7 @@
         <p:spPr>
           <a:xfrm>
             <a:off x="7791352" y="1289528"/>
-            <a:ext cx="3804247" cy="338554"/>
+            <a:ext cx="3869970" cy="338554"/>
           </a:xfrm>
           <a:prstGeom prst="rect">
             <a:avLst/>
@@ -6588,7 +6588,7 @@
             </a:r>
             <a:r>
               <a:rPr lang="en-US" altLang="ja-JP" sz="1600" baseline="30000"/>
-              <a:t>**</a:t>
+              <a:t>***</a:t>
             </a:r>
             <a:endParaRPr lang="en-US" altLang="ja-JP" sz="1600"/>
           </a:p>
@@ -6613,11 +6613,11 @@
         <p:spPr>
           <a:xfrm rot="10800000" flipH="1">
             <a:off x="5411962" y="1458806"/>
-            <a:ext cx="2379390" cy="1184365"/>
+            <a:ext cx="2379390" cy="1261999"/>
           </a:xfrm>
           <a:prstGeom prst="bentConnector3">
             <a:avLst>
-              <a:gd name="adj1" fmla="val 35091"/>
+              <a:gd name="adj1" fmla="val 41119"/>
             </a:avLst>
           </a:prstGeom>
           <a:ln w="12700">
@@ -6656,8 +6656,8 @@
         </p:nvSpPr>
         <p:spPr>
           <a:xfrm>
-            <a:off x="9292810" y="5828039"/>
-            <a:ext cx="2733415" cy="830997"/>
+            <a:off x="9458585" y="5842337"/>
+            <a:ext cx="2733415" cy="1015663"/>
           </a:xfrm>
           <a:prstGeom prst="rect">
             <a:avLst/>
@@ -6677,8 +6677,19 @@
           </a:p>
           <a:p>
             <a:r>
+              <a:rPr lang="en-US" altLang="ja-JP" sz="1200"/>
+              <a:t>**PMID</a:t>
+            </a:r>
+            <a:r>
+              <a:rPr lang="ja-JP" altLang="en-US" sz="1200"/>
+              <a:t>のペア</a:t>
+            </a:r>
+            <a:endParaRPr kumimoji="1" lang="en-US" altLang="ja-JP" sz="1200"/>
+          </a:p>
+          <a:p>
+            <a:r>
               <a:rPr kumimoji="1" lang="en-US" altLang="ja-JP" sz="1200"/>
-              <a:t>**</a:t>
+              <a:t>***</a:t>
             </a:r>
             <a:r>
               <a:rPr lang="ja-JP" altLang="en-US" sz="1200"/>
@@ -6705,7 +6716,7 @@
         </p:nvSpPr>
         <p:spPr>
           <a:xfrm>
-            <a:off x="247790" y="1113044"/>
+            <a:off x="247790" y="1121670"/>
             <a:ext cx="2001975" cy="276999"/>
           </a:xfrm>
           <a:prstGeom prst="rect">
@@ -6749,7 +6760,7 @@
         </p:nvSpPr>
         <p:spPr>
           <a:xfrm>
-            <a:off x="247791" y="1982740"/>
+            <a:off x="247791" y="1922358"/>
             <a:ext cx="2143713" cy="830997"/>
           </a:xfrm>
           <a:prstGeom prst="rect">
@@ -6803,7 +6814,7 @@
             </a:r>
             <a:r>
               <a:rPr lang="en-US" altLang="ja-JP" sz="1200" b="1"/>
-              <a:t>: 223,840,771</a:t>
+              <a:t>: 223,840,771**</a:t>
             </a:r>
           </a:p>
         </p:txBody>
@@ -6822,7 +6833,7 @@
         </p:nvSpPr>
         <p:spPr>
           <a:xfrm>
-            <a:off x="247791" y="2887766"/>
+            <a:off x="247791" y="3017159"/>
             <a:ext cx="2251240" cy="276999"/>
           </a:xfrm>
           <a:prstGeom prst="rect">
@@ -7982,7 +7993,7 @@
         </p:blipFill>
         <p:spPr>
           <a:xfrm>
-            <a:off x="3416501" y="3488683"/>
+            <a:off x="3182598" y="3419457"/>
             <a:ext cx="4713817" cy="2786922"/>
           </a:xfrm>
           <a:prstGeom prst="rect">
@@ -8004,7 +8015,7 @@
         </p:nvSpPr>
         <p:spPr>
           <a:xfrm>
-            <a:off x="4027164" y="6275605"/>
+            <a:off x="3559544" y="6206379"/>
             <a:ext cx="4137671" cy="276999"/>
           </a:xfrm>
           <a:prstGeom prst="rect">
@@ -8076,7 +8087,7 @@
         </p:nvSpPr>
         <p:spPr>
           <a:xfrm>
-            <a:off x="4379377" y="2671278"/>
+            <a:off x="4145474" y="2602052"/>
             <a:ext cx="2492990" cy="246221"/>
           </a:xfrm>
           <a:prstGeom prst="rect">
@@ -8111,7 +8122,7 @@
         </p:nvSpPr>
         <p:spPr>
           <a:xfrm>
-            <a:off x="7931118" y="2671278"/>
+            <a:off x="7697215" y="2602052"/>
             <a:ext cx="2951285" cy="400110"/>
           </a:xfrm>
           <a:prstGeom prst="rect">
@@ -8155,7 +8166,7 @@
         </p:nvSpPr>
         <p:spPr>
           <a:xfrm rot="16200000">
-            <a:off x="3996045" y="3158925"/>
+            <a:off x="3762142" y="3089699"/>
             <a:ext cx="246220" cy="734051"/>
           </a:xfrm>
           <a:prstGeom prst="rightBrace">
@@ -8204,7 +8215,7 @@
         </p:nvSpPr>
         <p:spPr>
           <a:xfrm rot="16200000">
-            <a:off x="7440983" y="3158925"/>
+            <a:off x="7207080" y="3089699"/>
             <a:ext cx="246220" cy="734051"/>
           </a:xfrm>
           <a:prstGeom prst="rightBrace">
@@ -8257,7 +8268,7 @@
         </p:nvCxnSpPr>
         <p:spPr>
           <a:xfrm rot="10800000" flipV="1">
-            <a:off x="4119157" y="2794389"/>
+            <a:off x="3885254" y="2725163"/>
             <a:ext cx="260221" cy="608452"/>
           </a:xfrm>
           <a:prstGeom prst="bentConnector4">
@@ -8305,7 +8316,7 @@
         </p:nvCxnSpPr>
         <p:spPr>
           <a:xfrm rot="10800000" flipV="1">
-            <a:off x="7565366" y="2871333"/>
+            <a:off x="7331463" y="2802107"/>
             <a:ext cx="365752" cy="497984"/>
           </a:xfrm>
           <a:prstGeom prst="bentConnector2">
@@ -8347,8 +8358,8 @@
         </p:nvSpPr>
         <p:spPr>
           <a:xfrm>
-            <a:off x="6358352" y="510047"/>
-            <a:ext cx="5833648" cy="1754326"/>
+            <a:off x="6395049" y="526285"/>
+            <a:ext cx="5796951" cy="1754326"/>
           </a:xfrm>
           <a:prstGeom prst="rect">
             <a:avLst/>
@@ -8356,7 +8367,7 @@
           <a:noFill/>
         </p:spPr>
         <p:txBody>
-          <a:bodyPr wrap="none" rtlCol="0">
+          <a:bodyPr wrap="square" rtlCol="0">
             <a:spAutoFit/>
           </a:bodyPr>
           <a:lstStyle/>

--- a/202312/MIS41.pptx
+++ b/202312/MIS41.pptx
@@ -5444,17 +5444,27 @@
             </a:pPr>
             <a:r>
               <a:rPr lang="en" altLang="ja-JP"/>
-              <a:t>R. E. Burton; R. W. Kebler. The “half-life” of some scientific and technical literatures. </a:t>
+              <a:t>Price, D. J. de Solla. Networks of Scientific Papers. </a:t>
             </a:r>
             <a:r>
               <a:rPr lang="en" altLang="ja-JP" i="1"/>
-              <a:t>American Documentation </a:t>
+              <a:t>Science</a:t>
             </a:r>
             <a:r>
               <a:rPr lang="en" altLang="ja-JP"/>
-              <a:t>(1960).</a:t>
-            </a:r>
-            <a:endParaRPr kumimoji="1" lang="en-US" altLang="ja-JP"/>
+              <a:t> (1965).</a:t>
+            </a:r>
+          </a:p>
+          <a:p>
+            <a:pPr marL="742950" lvl="1" indent="-285750">
+              <a:buFont typeface="Arial" panose="020B0604020202020204" pitchFamily="34" charset="0"/>
+              <a:buChar char="•"/>
+            </a:pPr>
+            <a:r>
+              <a:rPr lang="ja-JP" altLang="en-US"/>
+              <a:t>引用の減衰に言及</a:t>
+            </a:r>
+            <a:endParaRPr lang="en-US" altLang="ja-JP"/>
           </a:p>
           <a:p>
             <a:pPr marL="285750" indent="-285750">
@@ -5463,27 +5473,16 @@
             </a:pPr>
             <a:r>
               <a:rPr lang="en" altLang="ja-JP"/>
-              <a:t>Price, D. J. de Solla. Networks of Scientific Papers. </a:t>
+              <a:t>R. E. Burton; R. W. Kebler. The “half-life” of some scientific and technical literatures. </a:t>
             </a:r>
             <a:r>
               <a:rPr lang="en" altLang="ja-JP" i="1"/>
-              <a:t>Science</a:t>
+              <a:t>American Documentation </a:t>
             </a:r>
             <a:r>
               <a:rPr lang="en" altLang="ja-JP"/>
-              <a:t> (1965).</a:t>
-            </a:r>
-          </a:p>
-          <a:p>
-            <a:pPr marL="742950" lvl="1" indent="-285750">
-              <a:buFont typeface="Arial" panose="020B0604020202020204" pitchFamily="34" charset="0"/>
-              <a:buChar char="•"/>
-            </a:pPr>
-            <a:r>
-              <a:rPr lang="ja-JP" altLang="en-US"/>
-              <a:t>引用の減衰に言及</a:t>
-            </a:r>
-            <a:endParaRPr lang="en" altLang="ja-JP"/>
+              <a:t>(1960).</a:t>
+            </a:r>
           </a:p>
           <a:p>
             <a:pPr marL="285750" indent="-285750">

--- a/202312/MIS41.pptx
+++ b/202312/MIS41.pptx
@@ -206,7 +206,7 @@
           </a:lstStyle>
           <a:p>
             <a:fld id="{EC76ED7C-0D2F-D44D-81F8-4029A7FBE0FF}" type="datetimeFigureOut">
-              <a:t>2026/6/2</a:t>
+              <a:t>2026/6/4</a:t>
             </a:fld>
             <a:endParaRPr kumimoji="1" lang="ja-JP" altLang="en-US"/>
           </a:p>
@@ -733,7 +733,7 @@
           <a:lstStyle/>
           <a:p>
             <a:fld id="{B6986787-D869-A342-B24E-761DB6FBB920}" type="datetimeFigureOut">
-              <a:t>2026/6/2</a:t>
+              <a:t>2026/6/4</a:t>
             </a:fld>
             <a:endParaRPr kumimoji="1" lang="ja-JP" altLang="en-US"/>
           </a:p>
@@ -961,7 +961,7 @@
           <a:lstStyle/>
           <a:p>
             <a:fld id="{B6986787-D869-A342-B24E-761DB6FBB920}" type="datetimeFigureOut">
-              <a:t>2026/6/2</a:t>
+              <a:t>2026/6/4</a:t>
             </a:fld>
             <a:endParaRPr kumimoji="1" lang="ja-JP" altLang="en-US"/>
           </a:p>
@@ -1199,7 +1199,7 @@
           <a:lstStyle/>
           <a:p>
             <a:fld id="{B6986787-D869-A342-B24E-761DB6FBB920}" type="datetimeFigureOut">
-              <a:t>2026/6/2</a:t>
+              <a:t>2026/6/4</a:t>
             </a:fld>
             <a:endParaRPr kumimoji="1" lang="ja-JP" altLang="en-US"/>
           </a:p>
@@ -1427,7 +1427,7 @@
           <a:lstStyle/>
           <a:p>
             <a:fld id="{B6986787-D869-A342-B24E-761DB6FBB920}" type="datetimeFigureOut">
-              <a:t>2026/6/2</a:t>
+              <a:t>2026/6/4</a:t>
             </a:fld>
             <a:endParaRPr kumimoji="1" lang="ja-JP" altLang="en-US"/>
           </a:p>
@@ -1700,7 +1700,7 @@
           <a:lstStyle/>
           <a:p>
             <a:fld id="{B6986787-D869-A342-B24E-761DB6FBB920}" type="datetimeFigureOut">
-              <a:t>2026/6/2</a:t>
+              <a:t>2026/6/4</a:t>
             </a:fld>
             <a:endParaRPr kumimoji="1" lang="ja-JP" altLang="en-US"/>
           </a:p>
@@ -2027,7 +2027,7 @@
           <a:lstStyle/>
           <a:p>
             <a:fld id="{B6986787-D869-A342-B24E-761DB6FBB920}" type="datetimeFigureOut">
-              <a:t>2026/6/2</a:t>
+              <a:t>2026/6/4</a:t>
             </a:fld>
             <a:endParaRPr kumimoji="1" lang="ja-JP" altLang="en-US"/>
           </a:p>
@@ -2501,7 +2501,7 @@
           <a:lstStyle/>
           <a:p>
             <a:fld id="{B6986787-D869-A342-B24E-761DB6FBB920}" type="datetimeFigureOut">
-              <a:t>2026/6/2</a:t>
+              <a:t>2026/6/4</a:t>
             </a:fld>
             <a:endParaRPr kumimoji="1" lang="ja-JP" altLang="en-US"/>
           </a:p>
@@ -2640,7 +2640,7 @@
           <a:lstStyle/>
           <a:p>
             <a:fld id="{B6986787-D869-A342-B24E-761DB6FBB920}" type="datetimeFigureOut">
-              <a:t>2026/6/2</a:t>
+              <a:t>2026/6/4</a:t>
             </a:fld>
             <a:endParaRPr kumimoji="1" lang="ja-JP" altLang="en-US"/>
           </a:p>
@@ -2751,7 +2751,7 @@
           <a:lstStyle/>
           <a:p>
             <a:fld id="{B6986787-D869-A342-B24E-761DB6FBB920}" type="datetimeFigureOut">
-              <a:t>2026/6/2</a:t>
+              <a:t>2026/6/4</a:t>
             </a:fld>
             <a:endParaRPr kumimoji="1" lang="ja-JP" altLang="en-US"/>
           </a:p>
@@ -3092,7 +3092,7 @@
           <a:lstStyle/>
           <a:p>
             <a:fld id="{B6986787-D869-A342-B24E-761DB6FBB920}" type="datetimeFigureOut">
-              <a:t>2026/6/2</a:t>
+              <a:t>2026/6/4</a:t>
             </a:fld>
             <a:endParaRPr kumimoji="1" lang="ja-JP" altLang="en-US"/>
           </a:p>
@@ -3378,7 +3378,7 @@
           <a:lstStyle/>
           <a:p>
             <a:fld id="{B6986787-D869-A342-B24E-761DB6FBB920}" type="datetimeFigureOut">
-              <a:t>2026/6/2</a:t>
+              <a:t>2026/6/4</a:t>
             </a:fld>
             <a:endParaRPr kumimoji="1" lang="ja-JP" altLang="en-US"/>
           </a:p>
@@ -3649,7 +3649,7 @@
           </a:lstStyle>
           <a:p>
             <a:fld id="{B6986787-D869-A342-B24E-761DB6FBB920}" type="datetimeFigureOut">
-              <a:t>2026/6/2</a:t>
+              <a:t>2026/6/4</a:t>
             </a:fld>
             <a:endParaRPr kumimoji="1" lang="ja-JP" altLang="en-US"/>
           </a:p>
@@ -5126,7 +5126,7 @@
         <p:spPr>
           <a:xfrm>
             <a:off x="0" y="2554545"/>
-            <a:ext cx="6474849" cy="923330"/>
+            <a:ext cx="11982091" cy="1200329"/>
           </a:xfrm>
           <a:prstGeom prst="rect">
             <a:avLst/>
@@ -5134,7 +5134,7 @@
           <a:noFill/>
         </p:spPr>
         <p:txBody>
-          <a:bodyPr wrap="none" rtlCol="0">
+          <a:bodyPr wrap="square" rtlCol="0">
             <a:spAutoFit/>
           </a:bodyPr>
           <a:lstStyle/>
@@ -5164,6 +5164,14 @@
             <a:r>
               <a:rPr kumimoji="1" lang="ja-JP" altLang="en-US"/>
               <a:t>既存の多峰性判定アルゴリズムの精度（制御）に難がある</a:t>
+            </a:r>
+            <a:r>
+              <a:rPr kumimoji="1" lang="en-US" altLang="ja-JP"/>
+              <a:t> -&gt; </a:t>
+            </a:r>
+            <a:r>
+              <a:rPr kumimoji="1" lang="ja-JP" altLang="en-US"/>
+              <a:t>既存とは異なるアイデアに基づく新アルゴリズムを開発中</a:t>
             </a:r>
           </a:p>
         </p:txBody>
@@ -6655,8 +6663,8 @@
         </p:nvSpPr>
         <p:spPr>
           <a:xfrm>
-            <a:off x="9458585" y="5842337"/>
-            <a:ext cx="2733415" cy="1015663"/>
+            <a:off x="9273396" y="6027003"/>
+            <a:ext cx="2918604" cy="830997"/>
           </a:xfrm>
           <a:prstGeom prst="rect">
             <a:avLst/>

--- a/202312/MIS41.pptx
+++ b/202312/MIS41.pptx
@@ -5105,7 +5105,7 @@
             </a:pPr>
             <a:r>
               <a:rPr lang="ja-JP" altLang="en-US"/>
-              <a:t>オブソレッセンスが確認された論文とそうでない論文の間に多峰性の差は極めて小さく、モデルとしては関係しないと（揺らぎである）考えられる</a:t>
+              <a:t>オブソレッセンスが確認された論文とそうでない論文の間に多峰性の差は極めて小さく、モデルとしては関係しない（揺らぎである）と考えられる</a:t>
             </a:r>
             <a:endParaRPr kumimoji="1" lang="ja-JP" altLang="en-US"/>
           </a:p>

--- a/202312/MIS41.pptx
+++ b/202312/MIS41.pptx
@@ -206,7 +206,7 @@
           </a:lstStyle>
           <a:p>
             <a:fld id="{EC76ED7C-0D2F-D44D-81F8-4029A7FBE0FF}" type="datetimeFigureOut">
-              <a:t>2026/6/2</a:t>
+              <a:t>2026/6/23</a:t>
             </a:fld>
             <a:endParaRPr kumimoji="1" lang="ja-JP" altLang="en-US"/>
           </a:p>
@@ -733,7 +733,7 @@
           <a:lstStyle/>
           <a:p>
             <a:fld id="{B6986787-D869-A342-B24E-761DB6FBB920}" type="datetimeFigureOut">
-              <a:t>2026/6/2</a:t>
+              <a:t>2026/6/23</a:t>
             </a:fld>
             <a:endParaRPr kumimoji="1" lang="ja-JP" altLang="en-US"/>
           </a:p>
@@ -961,7 +961,7 @@
           <a:lstStyle/>
           <a:p>
             <a:fld id="{B6986787-D869-A342-B24E-761DB6FBB920}" type="datetimeFigureOut">
-              <a:t>2026/6/2</a:t>
+              <a:t>2026/6/23</a:t>
             </a:fld>
             <a:endParaRPr kumimoji="1" lang="ja-JP" altLang="en-US"/>
           </a:p>
@@ -1199,7 +1199,7 @@
           <a:lstStyle/>
           <a:p>
             <a:fld id="{B6986787-D869-A342-B24E-761DB6FBB920}" type="datetimeFigureOut">
-              <a:t>2026/6/2</a:t>
+              <a:t>2026/6/23</a:t>
             </a:fld>
             <a:endParaRPr kumimoji="1" lang="ja-JP" altLang="en-US"/>
           </a:p>
@@ -1427,7 +1427,7 @@
           <a:lstStyle/>
           <a:p>
             <a:fld id="{B6986787-D869-A342-B24E-761DB6FBB920}" type="datetimeFigureOut">
-              <a:t>2026/6/2</a:t>
+              <a:t>2026/6/23</a:t>
             </a:fld>
             <a:endParaRPr kumimoji="1" lang="ja-JP" altLang="en-US"/>
           </a:p>
@@ -1700,7 +1700,7 @@
           <a:lstStyle/>
           <a:p>
             <a:fld id="{B6986787-D869-A342-B24E-761DB6FBB920}" type="datetimeFigureOut">
-              <a:t>2026/6/2</a:t>
+              <a:t>2026/6/23</a:t>
             </a:fld>
             <a:endParaRPr kumimoji="1" lang="ja-JP" altLang="en-US"/>
           </a:p>
@@ -2027,7 +2027,7 @@
           <a:lstStyle/>
           <a:p>
             <a:fld id="{B6986787-D869-A342-B24E-761DB6FBB920}" type="datetimeFigureOut">
-              <a:t>2026/6/2</a:t>
+              <a:t>2026/6/23</a:t>
             </a:fld>
             <a:endParaRPr kumimoji="1" lang="ja-JP" altLang="en-US"/>
           </a:p>
@@ -2501,7 +2501,7 @@
           <a:lstStyle/>
           <a:p>
             <a:fld id="{B6986787-D869-A342-B24E-761DB6FBB920}" type="datetimeFigureOut">
-              <a:t>2026/6/2</a:t>
+              <a:t>2026/6/23</a:t>
             </a:fld>
             <a:endParaRPr kumimoji="1" lang="ja-JP" altLang="en-US"/>
           </a:p>
@@ -2640,7 +2640,7 @@
           <a:lstStyle/>
           <a:p>
             <a:fld id="{B6986787-D869-A342-B24E-761DB6FBB920}" type="datetimeFigureOut">
-              <a:t>2026/6/2</a:t>
+              <a:t>2026/6/23</a:t>
             </a:fld>
             <a:endParaRPr kumimoji="1" lang="ja-JP" altLang="en-US"/>
           </a:p>
@@ -2751,7 +2751,7 @@
           <a:lstStyle/>
           <a:p>
             <a:fld id="{B6986787-D869-A342-B24E-761DB6FBB920}" type="datetimeFigureOut">
-              <a:t>2026/6/2</a:t>
+              <a:t>2026/6/23</a:t>
             </a:fld>
             <a:endParaRPr kumimoji="1" lang="ja-JP" altLang="en-US"/>
           </a:p>
@@ -3092,7 +3092,7 @@
           <a:lstStyle/>
           <a:p>
             <a:fld id="{B6986787-D869-A342-B24E-761DB6FBB920}" type="datetimeFigureOut">
-              <a:t>2026/6/2</a:t>
+              <a:t>2026/6/23</a:t>
             </a:fld>
             <a:endParaRPr kumimoji="1" lang="ja-JP" altLang="en-US"/>
           </a:p>
@@ -3378,7 +3378,7 @@
           <a:lstStyle/>
           <a:p>
             <a:fld id="{B6986787-D869-A342-B24E-761DB6FBB920}" type="datetimeFigureOut">
-              <a:t>2026/6/2</a:t>
+              <a:t>2026/6/23</a:t>
             </a:fld>
             <a:endParaRPr kumimoji="1" lang="ja-JP" altLang="en-US"/>
           </a:p>
@@ -3649,7 +3649,7 @@
           </a:lstStyle>
           <a:p>
             <a:fld id="{B6986787-D869-A342-B24E-761DB6FBB920}" type="datetimeFigureOut">
-              <a:t>2026/6/2</a:t>
+              <a:t>2026/6/23</a:t>
             </a:fld>
             <a:endParaRPr kumimoji="1" lang="ja-JP" altLang="en-US"/>
           </a:p>
@@ -5662,7 +5662,7 @@
             </a:pPr>
             <a:r>
               <a:rPr lang="ja-JP" altLang="en-US"/>
-              <a:t>長期にわたる被引用数の変動、これによる順位の変動</a:t>
+              <a:t>各論文の長期にわたる被引用数の変動、これによる順位の変動</a:t>
             </a:r>
             <a:endParaRPr lang="en-US" altLang="ja-JP"/>
           </a:p>
@@ -5684,7 +5684,7 @@
             </a:pPr>
             <a:r>
               <a:rPr lang="ja-JP" altLang="en-US"/>
-              <a:t>リバイバル性（被引用の多峰性）と被引用の寿命との関係</a:t>
+              <a:t>リバイバル性（被引用の多峰性）とオブソレッセンスとの関係</a:t>
             </a:r>
           </a:p>
         </p:txBody>

--- a/202312/MIS41.pptx
+++ b/202312/MIS41.pptx
@@ -206,7 +206,7 @@
           </a:lstStyle>
           <a:p>
             <a:fld id="{EC76ED7C-0D2F-D44D-81F8-4029A7FBE0FF}" type="datetimeFigureOut">
-              <a:t>2026/6/4</a:t>
+              <a:t>2026/7/23</a:t>
             </a:fld>
             <a:endParaRPr kumimoji="1" lang="ja-JP" altLang="en-US"/>
           </a:p>
@@ -548,6 +548,109 @@
           <a:bodyPr/>
           <a:lstStyle/>
           <a:p>
+            <a:r>
+              <a:rPr kumimoji="1" lang="ja-JP" altLang="en-US"/>
+              <a:t>発表時間</a:t>
+            </a:r>
+            <a:r>
+              <a:rPr kumimoji="1" lang="en-US" altLang="ja-JP"/>
+              <a:t>12</a:t>
+            </a:r>
+            <a:r>
+              <a:rPr kumimoji="1" lang="ja-JP" altLang="en-US"/>
+              <a:t>分、質疑応答</a:t>
+            </a:r>
+            <a:r>
+              <a:rPr kumimoji="1" lang="en-US" altLang="ja-JP"/>
+              <a:t>3</a:t>
+            </a:r>
+            <a:r>
+              <a:rPr kumimoji="1" lang="ja-JP" altLang="en-US"/>
+              <a:t>分</a:t>
+            </a:r>
+          </a:p>
+        </p:txBody>
+      </p:sp>
+      <p:sp>
+        <p:nvSpPr>
+          <p:cNvPr id="4" name="スライド番号プレースホルダー 3"/>
+          <p:cNvSpPr>
+            <a:spLocks noGrp="1"/>
+          </p:cNvSpPr>
+          <p:nvPr>
+            <p:ph type="sldNum" sz="quarter" idx="5"/>
+          </p:nvPr>
+        </p:nvSpPr>
+        <p:spPr/>
+        <p:txBody>
+          <a:bodyPr/>
+          <a:lstStyle/>
+          <a:p>
+            <a:fld id="{27977321-DEE7-7F4E-84BB-2CD11C156459}" type="slidenum">
+              <a:rPr lang="en-US" altLang="ja-JP"/>
+              <a:t>1</a:t>
+            </a:fld>
+            <a:endParaRPr kumimoji="1" lang="ja-JP" altLang="en-US"/>
+          </a:p>
+        </p:txBody>
+      </p:sp>
+    </p:spTree>
+    <p:extLst>
+      <p:ext uri="{BB962C8B-B14F-4D97-AF65-F5344CB8AC3E}">
+        <p14:creationId xmlns:p14="http://schemas.microsoft.com/office/powerpoint/2010/main" val="1457154321"/>
+      </p:ext>
+    </p:extLst>
+  </p:cSld>
+  <p:clrMapOvr>
+    <a:masterClrMapping/>
+  </p:clrMapOvr>
+</p:notes>
+</file>
+
+<file path=ppt/notesSlides/notesSlide2.xml><?xml version="1.0" encoding="utf-8"?>
+<p:notes xmlns:a="http://schemas.openxmlformats.org/drawingml/2006/main" xmlns:r="http://schemas.openxmlformats.org/officeDocument/2006/relationships" xmlns:p="http://schemas.openxmlformats.org/presentationml/2006/main">
+  <p:cSld>
+    <p:spTree>
+      <p:nvGrpSpPr>
+        <p:cNvPr id="1" name=""/>
+        <p:cNvGrpSpPr/>
+        <p:nvPr/>
+      </p:nvGrpSpPr>
+      <p:grpSpPr>
+        <a:xfrm>
+          <a:off x="0" y="0"/>
+          <a:ext cx="0" cy="0"/>
+          <a:chOff x="0" y="0"/>
+          <a:chExt cx="0" cy="0"/>
+        </a:xfrm>
+      </p:grpSpPr>
+      <p:sp>
+        <p:nvSpPr>
+          <p:cNvPr id="2" name="スライド イメージ プレースホルダー 1"/>
+          <p:cNvSpPr>
+            <a:spLocks noGrp="1" noRot="1" noChangeAspect="1"/>
+          </p:cNvSpPr>
+          <p:nvPr>
+            <p:ph type="sldImg"/>
+          </p:nvPr>
+        </p:nvSpPr>
+        <p:spPr/>
+      </p:sp>
+      <p:sp>
+        <p:nvSpPr>
+          <p:cNvPr id="3" name="ノート プレースホルダー 2"/>
+          <p:cNvSpPr>
+            <a:spLocks noGrp="1"/>
+          </p:cNvSpPr>
+          <p:nvPr>
+            <p:ph type="body" idx="1"/>
+          </p:nvPr>
+        </p:nvSpPr>
+        <p:spPr/>
+        <p:txBody>
+          <a:bodyPr/>
+          <a:lstStyle/>
+          <a:p>
             <a:endParaRPr kumimoji="1" lang="ja-JP" altLang="en-US"/>
           </a:p>
         </p:txBody>
@@ -733,7 +836,7 @@
           <a:lstStyle/>
           <a:p>
             <a:fld id="{B6986787-D869-A342-B24E-761DB6FBB920}" type="datetimeFigureOut">
-              <a:t>2026/6/4</a:t>
+              <a:t>2026/7/23</a:t>
             </a:fld>
             <a:endParaRPr kumimoji="1" lang="ja-JP" altLang="en-US"/>
           </a:p>
@@ -961,7 +1064,7 @@
           <a:lstStyle/>
           <a:p>
             <a:fld id="{B6986787-D869-A342-B24E-761DB6FBB920}" type="datetimeFigureOut">
-              <a:t>2026/6/4</a:t>
+              <a:t>2026/7/23</a:t>
             </a:fld>
             <a:endParaRPr kumimoji="1" lang="ja-JP" altLang="en-US"/>
           </a:p>
@@ -1199,7 +1302,7 @@
           <a:lstStyle/>
           <a:p>
             <a:fld id="{B6986787-D869-A342-B24E-761DB6FBB920}" type="datetimeFigureOut">
-              <a:t>2026/6/4</a:t>
+              <a:t>2026/7/23</a:t>
             </a:fld>
             <a:endParaRPr kumimoji="1" lang="ja-JP" altLang="en-US"/>
           </a:p>
@@ -1427,7 +1530,7 @@
           <a:lstStyle/>
           <a:p>
             <a:fld id="{B6986787-D869-A342-B24E-761DB6FBB920}" type="datetimeFigureOut">
-              <a:t>2026/6/4</a:t>
+              <a:t>2026/7/23</a:t>
             </a:fld>
             <a:endParaRPr kumimoji="1" lang="ja-JP" altLang="en-US"/>
           </a:p>
@@ -1700,7 +1803,7 @@
           <a:lstStyle/>
           <a:p>
             <a:fld id="{B6986787-D869-A342-B24E-761DB6FBB920}" type="datetimeFigureOut">
-              <a:t>2026/6/4</a:t>
+              <a:t>2026/7/23</a:t>
             </a:fld>
             <a:endParaRPr kumimoji="1" lang="ja-JP" altLang="en-US"/>
           </a:p>
@@ -2027,7 +2130,7 @@
           <a:lstStyle/>
           <a:p>
             <a:fld id="{B6986787-D869-A342-B24E-761DB6FBB920}" type="datetimeFigureOut">
-              <a:t>2026/6/4</a:t>
+              <a:t>2026/7/23</a:t>
             </a:fld>
             <a:endParaRPr kumimoji="1" lang="ja-JP" altLang="en-US"/>
           </a:p>
@@ -2501,7 +2604,7 @@
           <a:lstStyle/>
           <a:p>
             <a:fld id="{B6986787-D869-A342-B24E-761DB6FBB920}" type="datetimeFigureOut">
-              <a:t>2026/6/4</a:t>
+              <a:t>2026/7/23</a:t>
             </a:fld>
             <a:endParaRPr kumimoji="1" lang="ja-JP" altLang="en-US"/>
           </a:p>
@@ -2640,7 +2743,7 @@
           <a:lstStyle/>
           <a:p>
             <a:fld id="{B6986787-D869-A342-B24E-761DB6FBB920}" type="datetimeFigureOut">
-              <a:t>2026/6/4</a:t>
+              <a:t>2026/7/23</a:t>
             </a:fld>
             <a:endParaRPr kumimoji="1" lang="ja-JP" altLang="en-US"/>
           </a:p>
@@ -2751,7 +2854,7 @@
           <a:lstStyle/>
           <a:p>
             <a:fld id="{B6986787-D869-A342-B24E-761DB6FBB920}" type="datetimeFigureOut">
-              <a:t>2026/6/4</a:t>
+              <a:t>2026/7/23</a:t>
             </a:fld>
             <a:endParaRPr kumimoji="1" lang="ja-JP" altLang="en-US"/>
           </a:p>
@@ -3092,7 +3195,7 @@
           <a:lstStyle/>
           <a:p>
             <a:fld id="{B6986787-D869-A342-B24E-761DB6FBB920}" type="datetimeFigureOut">
-              <a:t>2026/6/4</a:t>
+              <a:t>2026/7/23</a:t>
             </a:fld>
             <a:endParaRPr kumimoji="1" lang="ja-JP" altLang="en-US"/>
           </a:p>
@@ -3378,7 +3481,7 @@
           <a:lstStyle/>
           <a:p>
             <a:fld id="{B6986787-D869-A342-B24E-761DB6FBB920}" type="datetimeFigureOut">
-              <a:t>2026/6/4</a:t>
+              <a:t>2026/7/23</a:t>
             </a:fld>
             <a:endParaRPr kumimoji="1" lang="ja-JP" altLang="en-US"/>
           </a:p>
@@ -3649,7 +3752,7 @@
           </a:lstStyle>
           <a:p>
             <a:fld id="{B6986787-D869-A342-B24E-761DB6FBB920}" type="datetimeFigureOut">
-              <a:t>2026/6/4</a:t>
+              <a:t>2026/7/23</a:t>
             </a:fld>
             <a:endParaRPr kumimoji="1" lang="ja-JP" altLang="en-US"/>
           </a:p>

--- a/202312/MIS41.pptx
+++ b/202312/MIS41.pptx
@@ -206,7 +206,7 @@
           </a:lstStyle>
           <a:p>
             <a:fld id="{EC76ED7C-0D2F-D44D-81F8-4029A7FBE0FF}" type="datetimeFigureOut">
-              <a:t>2026/6/23</a:t>
+              <a:t>2026/7/23</a:t>
             </a:fld>
             <a:endParaRPr kumimoji="1" lang="ja-JP" altLang="en-US"/>
           </a:p>
@@ -548,6 +548,113 @@
           <a:bodyPr/>
           <a:lstStyle/>
           <a:p>
+            <a:r>
+              <a:rPr kumimoji="1" lang="ja-JP" altLang="en-US"/>
+              <a:t>発表</a:t>
+            </a:r>
+            <a:r>
+              <a:rPr kumimoji="1" lang="en-US" altLang="ja-JP"/>
+              <a:t>12</a:t>
+            </a:r>
+            <a:r>
+              <a:rPr kumimoji="1" lang="ja-JP" altLang="en-US"/>
+              <a:t>分、質疑応答</a:t>
+            </a:r>
+            <a:r>
+              <a:rPr kumimoji="1" lang="en-US" altLang="ja-JP"/>
+              <a:t>3</a:t>
+            </a:r>
+            <a:r>
+              <a:rPr kumimoji="1" lang="ja-JP" altLang="en-US"/>
+              <a:t>分。</a:t>
+            </a:r>
+            <a:endParaRPr kumimoji="1" lang="en-US" altLang="ja-JP"/>
+          </a:p>
+          <a:p>
+            <a:endParaRPr kumimoji="1" lang="ja-JP" altLang="en-US"/>
+          </a:p>
+        </p:txBody>
+      </p:sp>
+      <p:sp>
+        <p:nvSpPr>
+          <p:cNvPr id="4" name="スライド番号プレースホルダー 3"/>
+          <p:cNvSpPr>
+            <a:spLocks noGrp="1"/>
+          </p:cNvSpPr>
+          <p:nvPr>
+            <p:ph type="sldNum" sz="quarter" idx="5"/>
+          </p:nvPr>
+        </p:nvSpPr>
+        <p:spPr/>
+        <p:txBody>
+          <a:bodyPr/>
+          <a:lstStyle/>
+          <a:p>
+            <a:fld id="{27977321-DEE7-7F4E-84BB-2CD11C156459}" type="slidenum">
+              <a:rPr lang="en-US" altLang="ja-JP"/>
+              <a:t>1</a:t>
+            </a:fld>
+            <a:endParaRPr kumimoji="1" lang="ja-JP" altLang="en-US"/>
+          </a:p>
+        </p:txBody>
+      </p:sp>
+    </p:spTree>
+    <p:extLst>
+      <p:ext uri="{BB962C8B-B14F-4D97-AF65-F5344CB8AC3E}">
+        <p14:creationId xmlns:p14="http://schemas.microsoft.com/office/powerpoint/2010/main" val="2104620826"/>
+      </p:ext>
+    </p:extLst>
+  </p:cSld>
+  <p:clrMapOvr>
+    <a:masterClrMapping/>
+  </p:clrMapOvr>
+</p:notes>
+</file>
+
+<file path=ppt/notesSlides/notesSlide2.xml><?xml version="1.0" encoding="utf-8"?>
+<p:notes xmlns:a="http://schemas.openxmlformats.org/drawingml/2006/main" xmlns:r="http://schemas.openxmlformats.org/officeDocument/2006/relationships" xmlns:p="http://schemas.openxmlformats.org/presentationml/2006/main">
+  <p:cSld>
+    <p:spTree>
+      <p:nvGrpSpPr>
+        <p:cNvPr id="1" name=""/>
+        <p:cNvGrpSpPr/>
+        <p:nvPr/>
+      </p:nvGrpSpPr>
+      <p:grpSpPr>
+        <a:xfrm>
+          <a:off x="0" y="0"/>
+          <a:ext cx="0" cy="0"/>
+          <a:chOff x="0" y="0"/>
+          <a:chExt cx="0" cy="0"/>
+        </a:xfrm>
+      </p:grpSpPr>
+      <p:sp>
+        <p:nvSpPr>
+          <p:cNvPr id="2" name="スライド イメージ プレースホルダー 1"/>
+          <p:cNvSpPr>
+            <a:spLocks noGrp="1" noRot="1" noChangeAspect="1"/>
+          </p:cNvSpPr>
+          <p:nvPr>
+            <p:ph type="sldImg"/>
+          </p:nvPr>
+        </p:nvSpPr>
+        <p:spPr/>
+      </p:sp>
+      <p:sp>
+        <p:nvSpPr>
+          <p:cNvPr id="3" name="ノート プレースホルダー 2"/>
+          <p:cNvSpPr>
+            <a:spLocks noGrp="1"/>
+          </p:cNvSpPr>
+          <p:nvPr>
+            <p:ph type="body" idx="1"/>
+          </p:nvPr>
+        </p:nvSpPr>
+        <p:spPr/>
+        <p:txBody>
+          <a:bodyPr/>
+          <a:lstStyle/>
+          <a:p>
             <a:endParaRPr kumimoji="1" lang="ja-JP" altLang="en-US"/>
           </a:p>
         </p:txBody>
@@ -733,7 +840,7 @@
           <a:lstStyle/>
           <a:p>
             <a:fld id="{B6986787-D869-A342-B24E-761DB6FBB920}" type="datetimeFigureOut">
-              <a:t>2026/6/23</a:t>
+              <a:t>2026/7/23</a:t>
             </a:fld>
             <a:endParaRPr kumimoji="1" lang="ja-JP" altLang="en-US"/>
           </a:p>
@@ -961,7 +1068,7 @@
           <a:lstStyle/>
           <a:p>
             <a:fld id="{B6986787-D869-A342-B24E-761DB6FBB920}" type="datetimeFigureOut">
-              <a:t>2026/6/23</a:t>
+              <a:t>2026/7/23</a:t>
             </a:fld>
             <a:endParaRPr kumimoji="1" lang="ja-JP" altLang="en-US"/>
           </a:p>
@@ -1199,7 +1306,7 @@
           <a:lstStyle/>
           <a:p>
             <a:fld id="{B6986787-D869-A342-B24E-761DB6FBB920}" type="datetimeFigureOut">
-              <a:t>2026/6/23</a:t>
+              <a:t>2026/7/23</a:t>
             </a:fld>
             <a:endParaRPr kumimoji="1" lang="ja-JP" altLang="en-US"/>
           </a:p>
@@ -1427,7 +1534,7 @@
           <a:lstStyle/>
           <a:p>
             <a:fld id="{B6986787-D869-A342-B24E-761DB6FBB920}" type="datetimeFigureOut">
-              <a:t>2026/6/23</a:t>
+              <a:t>2026/7/23</a:t>
             </a:fld>
             <a:endParaRPr kumimoji="1" lang="ja-JP" altLang="en-US"/>
           </a:p>
@@ -1700,7 +1807,7 @@
           <a:lstStyle/>
           <a:p>
             <a:fld id="{B6986787-D869-A342-B24E-761DB6FBB920}" type="datetimeFigureOut">
-              <a:t>2026/6/23</a:t>
+              <a:t>2026/7/23</a:t>
             </a:fld>
             <a:endParaRPr kumimoji="1" lang="ja-JP" altLang="en-US"/>
           </a:p>
@@ -2027,7 +2134,7 @@
           <a:lstStyle/>
           <a:p>
             <a:fld id="{B6986787-D869-A342-B24E-761DB6FBB920}" type="datetimeFigureOut">
-              <a:t>2026/6/23</a:t>
+              <a:t>2026/7/23</a:t>
             </a:fld>
             <a:endParaRPr kumimoji="1" lang="ja-JP" altLang="en-US"/>
           </a:p>
@@ -2501,7 +2608,7 @@
           <a:lstStyle/>
           <a:p>
             <a:fld id="{B6986787-D869-A342-B24E-761DB6FBB920}" type="datetimeFigureOut">
-              <a:t>2026/6/23</a:t>
+              <a:t>2026/7/23</a:t>
             </a:fld>
             <a:endParaRPr kumimoji="1" lang="ja-JP" altLang="en-US"/>
           </a:p>
@@ -2640,7 +2747,7 @@
           <a:lstStyle/>
           <a:p>
             <a:fld id="{B6986787-D869-A342-B24E-761DB6FBB920}" type="datetimeFigureOut">
-              <a:t>2026/6/23</a:t>
+              <a:t>2026/7/23</a:t>
             </a:fld>
             <a:endParaRPr kumimoji="1" lang="ja-JP" altLang="en-US"/>
           </a:p>
@@ -2751,7 +2858,7 @@
           <a:lstStyle/>
           <a:p>
             <a:fld id="{B6986787-D869-A342-B24E-761DB6FBB920}" type="datetimeFigureOut">
-              <a:t>2026/6/23</a:t>
+              <a:t>2026/7/23</a:t>
             </a:fld>
             <a:endParaRPr kumimoji="1" lang="ja-JP" altLang="en-US"/>
           </a:p>
@@ -3092,7 +3199,7 @@
           <a:lstStyle/>
           <a:p>
             <a:fld id="{B6986787-D869-A342-B24E-761DB6FBB920}" type="datetimeFigureOut">
-              <a:t>2026/6/23</a:t>
+              <a:t>2026/7/23</a:t>
             </a:fld>
             <a:endParaRPr kumimoji="1" lang="ja-JP" altLang="en-US"/>
           </a:p>
@@ -3378,7 +3485,7 @@
           <a:lstStyle/>
           <a:p>
             <a:fld id="{B6986787-D869-A342-B24E-761DB6FBB920}" type="datetimeFigureOut">
-              <a:t>2026/6/23</a:t>
+              <a:t>2026/7/23</a:t>
             </a:fld>
             <a:endParaRPr kumimoji="1" lang="ja-JP" altLang="en-US"/>
           </a:p>
@@ -3649,7 +3756,7 @@
           </a:lstStyle>
           <a:p>
             <a:fld id="{B6986787-D869-A342-B24E-761DB6FBB920}" type="datetimeFigureOut">
-              <a:t>2026/6/23</a:t>
+              <a:t>2026/7/23</a:t>
             </a:fld>
             <a:endParaRPr kumimoji="1" lang="ja-JP" altLang="en-US"/>
           </a:p>
